--- a/material/5_AI/05_시계열 분석.pptx
+++ b/material/5_AI/05_시계열 분석.pptx
@@ -5,7 +5,7 @@
     <p:sldMasterId id="2147483660" r:id="rId1"/>
   </p:sldMasterIdLst>
   <p:notesMasterIdLst>
-    <p:notesMasterId r:id="rId15"/>
+    <p:notesMasterId r:id="rId20"/>
   </p:notesMasterIdLst>
   <p:sldIdLst>
     <p:sldId id="1020" r:id="rId2"/>
@@ -20,7 +20,12 @@
     <p:sldId id="1042" r:id="rId11"/>
     <p:sldId id="1043" r:id="rId12"/>
     <p:sldId id="1045" r:id="rId13"/>
-    <p:sldId id="836" r:id="rId14"/>
+    <p:sldId id="1046" r:id="rId14"/>
+    <p:sldId id="1047" r:id="rId15"/>
+    <p:sldId id="1048" r:id="rId16"/>
+    <p:sldId id="1049" r:id="rId17"/>
+    <p:sldId id="1050" r:id="rId18"/>
+    <p:sldId id="836" r:id="rId19"/>
   </p:sldIdLst>
   <p:sldSz cx="12192000" cy="6858000"/>
   <p:notesSz cx="6858000" cy="9144000"/>
@@ -230,7 +235,7 @@
             <a:fld id="{A13A867C-D490-40C2-AB8D-A60FA70A9BF5}" type="datetimeFigureOut">
               <a:rPr lang="ko-KR" altLang="en-US" smtClean="0"/>
               <a:pPr/>
-              <a:t>2026-02-04</a:t>
+              <a:t>2026-02-05</a:t>
             </a:fld>
             <a:endParaRPr lang="ko-KR" altLang="en-US" dirty="0"/>
           </a:p>
@@ -1014,6 +1019,579 @@
   <p:cSld>
     <p:spTree>
       <p:nvGrpSpPr>
+        <p:cNvPr id="1" name=""/>
+        <p:cNvGrpSpPr/>
+        <p:nvPr/>
+      </p:nvGrpSpPr>
+      <p:grpSpPr>
+        <a:xfrm>
+          <a:off x="0" y="0"/>
+          <a:ext cx="0" cy="0"/>
+          <a:chOff x="0" y="0"/>
+          <a:chExt cx="0" cy="0"/>
+        </a:xfrm>
+      </p:grpSpPr>
+      <p:sp>
+        <p:nvSpPr>
+          <p:cNvPr id="2" name="슬라이드 이미지 개체 틀 1"/>
+          <p:cNvSpPr>
+            <a:spLocks noGrp="1" noRot="1" noChangeAspect="1"/>
+          </p:cNvSpPr>
+          <p:nvPr>
+            <p:ph type="sldImg"/>
+          </p:nvPr>
+        </p:nvSpPr>
+        <p:spPr/>
+      </p:sp>
+      <p:sp>
+        <p:nvSpPr>
+          <p:cNvPr id="3" name="슬라이드 노트 개체 틀 2"/>
+          <p:cNvSpPr>
+            <a:spLocks noGrp="1"/>
+          </p:cNvSpPr>
+          <p:nvPr>
+            <p:ph type="body" idx="1"/>
+          </p:nvPr>
+        </p:nvSpPr>
+        <p:spPr/>
+        <p:txBody>
+          <a:bodyPr/>
+          <a:lstStyle/>
+          <a:p>
+            <a:r>
+              <a:rPr lang="ko-KR" altLang="en-US" b="1" dirty="0"/>
+              <a:t>언제 “예측 </a:t>
+            </a:r>
+            <a:r>
+              <a:rPr lang="ko-KR" altLang="en-US" b="1" dirty="0" err="1"/>
+              <a:t>문제”가</a:t>
+            </a:r>
+            <a:r>
+              <a:rPr lang="ko-KR" altLang="en-US" b="1" dirty="0"/>
+              <a:t> 되는가</a:t>
+            </a:r>
+            <a:r>
+              <a:rPr lang="en-US" altLang="ko-KR" b="1" dirty="0"/>
+              <a:t>?</a:t>
+            </a:r>
+          </a:p>
+          <a:p>
+            <a:r>
+              <a:rPr lang="ko-KR" altLang="en-US" dirty="0"/>
+              <a:t>시계열 데이터가 </a:t>
+            </a:r>
+            <a:r>
+              <a:rPr lang="ko-KR" altLang="en-US" b="1" dirty="0"/>
+              <a:t>예측 문제</a:t>
+            </a:r>
+            <a:r>
+              <a:rPr lang="ko-KR" altLang="en-US" dirty="0"/>
+              <a:t>가 되려면</a:t>
+            </a:r>
+            <a:br>
+              <a:rPr lang="ko-KR" altLang="en-US" dirty="0"/>
+            </a:br>
+            <a:r>
+              <a:rPr lang="ko-KR" altLang="en-US" dirty="0"/>
+              <a:t>반드시 이 질문이 명확해야 한다</a:t>
+            </a:r>
+            <a:r>
+              <a:rPr lang="en-US" altLang="ko-KR" dirty="0"/>
+              <a:t>.</a:t>
+            </a:r>
+          </a:p>
+          <a:p>
+            <a:r>
+              <a:rPr lang="ko-KR" altLang="en-US" b="1" dirty="0"/>
+              <a:t>“우리는 이 데이터를 써서</a:t>
+            </a:r>
+            <a:br>
+              <a:rPr lang="ko-KR" altLang="en-US" b="1" dirty="0"/>
+            </a:br>
+            <a:r>
+              <a:rPr lang="ko-KR" altLang="en-US" b="1" dirty="0"/>
+              <a:t>미래의 무엇을 결정하려 하는가</a:t>
+            </a:r>
+            <a:r>
+              <a:rPr lang="en-US" altLang="ko-KR" b="1" dirty="0"/>
+              <a:t>?”</a:t>
+            </a:r>
+            <a:endParaRPr lang="ko-KR" altLang="en-US" dirty="0"/>
+          </a:p>
+          <a:p>
+            <a:endParaRPr lang="ko-KR" altLang="en-US" dirty="0"/>
+          </a:p>
+        </p:txBody>
+      </p:sp>
+      <p:sp>
+        <p:nvSpPr>
+          <p:cNvPr id="4" name="슬라이드 번호 개체 틀 3"/>
+          <p:cNvSpPr>
+            <a:spLocks noGrp="1"/>
+          </p:cNvSpPr>
+          <p:nvPr>
+            <p:ph type="sldNum" sz="quarter" idx="5"/>
+          </p:nvPr>
+        </p:nvSpPr>
+        <p:spPr/>
+        <p:txBody>
+          <a:bodyPr/>
+          <a:lstStyle/>
+          <a:p>
+            <a:fld id="{3E35EA20-6519-4513-9EDC-C89C5369BAEC}" type="slidenum">
+              <a:rPr lang="ko-KR" altLang="en-US" smtClean="0"/>
+              <a:pPr/>
+              <a:t>14</a:t>
+            </a:fld>
+            <a:endParaRPr lang="ko-KR" altLang="en-US" dirty="0"/>
+          </a:p>
+        </p:txBody>
+      </p:sp>
+    </p:spTree>
+    <p:extLst>
+      <p:ext uri="{BB962C8B-B14F-4D97-AF65-F5344CB8AC3E}">
+        <p14:creationId xmlns:p14="http://schemas.microsoft.com/office/powerpoint/2010/main" val="2024333393"/>
+      </p:ext>
+    </p:extLst>
+  </p:cSld>
+  <p:clrMapOvr>
+    <a:masterClrMapping/>
+  </p:clrMapOvr>
+</p:notes>
+</file>
+
+<file path=ppt/notesSlides/notesSlide6.xml><?xml version="1.0" encoding="utf-8"?>
+<p:notes xmlns:a="http://schemas.openxmlformats.org/drawingml/2006/main" xmlns:r="http://schemas.openxmlformats.org/officeDocument/2006/relationships" xmlns:p="http://schemas.openxmlformats.org/presentationml/2006/main">
+  <p:cSld>
+    <p:spTree>
+      <p:nvGrpSpPr>
+        <p:cNvPr id="1" name=""/>
+        <p:cNvGrpSpPr/>
+        <p:nvPr/>
+      </p:nvGrpSpPr>
+      <p:grpSpPr>
+        <a:xfrm>
+          <a:off x="0" y="0"/>
+          <a:ext cx="0" cy="0"/>
+          <a:chOff x="0" y="0"/>
+          <a:chExt cx="0" cy="0"/>
+        </a:xfrm>
+      </p:grpSpPr>
+      <p:sp>
+        <p:nvSpPr>
+          <p:cNvPr id="2" name="슬라이드 이미지 개체 틀 1"/>
+          <p:cNvSpPr>
+            <a:spLocks noGrp="1" noRot="1" noChangeAspect="1"/>
+          </p:cNvSpPr>
+          <p:nvPr>
+            <p:ph type="sldImg"/>
+          </p:nvPr>
+        </p:nvSpPr>
+        <p:spPr/>
+      </p:sp>
+      <p:sp>
+        <p:nvSpPr>
+          <p:cNvPr id="3" name="슬라이드 노트 개체 틀 2"/>
+          <p:cNvSpPr>
+            <a:spLocks noGrp="1"/>
+          </p:cNvSpPr>
+          <p:nvPr>
+            <p:ph type="body" idx="1"/>
+          </p:nvPr>
+        </p:nvSpPr>
+        <p:spPr/>
+        <p:txBody>
+          <a:bodyPr/>
+          <a:lstStyle/>
+          <a:p>
+            <a:r>
+              <a:rPr lang="ko-KR" altLang="en-US" b="1" dirty="0"/>
+              <a:t>🎤 강사 설명 포인트</a:t>
+            </a:r>
+          </a:p>
+          <a:p>
+            <a:r>
+              <a:rPr lang="ko-KR" altLang="en-US" dirty="0"/>
+              <a:t>“예측 문제에서 가장 중요한 건</a:t>
+            </a:r>
+            <a:br>
+              <a:rPr lang="ko-KR" altLang="en-US" dirty="0"/>
+            </a:br>
+            <a:r>
+              <a:rPr lang="ko-KR" altLang="en-US" dirty="0"/>
+              <a:t>모델이 아니라 </a:t>
+            </a:r>
+            <a:r>
+              <a:rPr lang="ko-KR" altLang="en-US" b="1" dirty="0"/>
+              <a:t>예측 대상 정의</a:t>
+            </a:r>
+            <a:r>
+              <a:rPr lang="ko-KR" altLang="en-US" dirty="0"/>
+              <a:t>입니다</a:t>
+            </a:r>
+            <a:r>
+              <a:rPr lang="en-US" altLang="ko-KR" dirty="0"/>
+              <a:t>.”</a:t>
+            </a:r>
+          </a:p>
+          <a:p>
+            <a:r>
+              <a:rPr lang="ko-KR" altLang="en-US" dirty="0"/>
+              <a:t>언제의 값인가</a:t>
+            </a:r>
+            <a:r>
+              <a:rPr lang="en-US" altLang="ko-KR" dirty="0"/>
+              <a:t>?</a:t>
+            </a:r>
+          </a:p>
+          <a:p>
+            <a:r>
+              <a:rPr lang="ko-KR" altLang="en-US" dirty="0"/>
+              <a:t>단기인가</a:t>
+            </a:r>
+            <a:r>
+              <a:rPr lang="en-US" altLang="ko-KR" dirty="0"/>
+              <a:t>, </a:t>
+            </a:r>
+            <a:r>
+              <a:rPr lang="ko-KR" altLang="en-US" dirty="0"/>
+              <a:t>장기인가</a:t>
+            </a:r>
+            <a:r>
+              <a:rPr lang="en-US" altLang="ko-KR" dirty="0"/>
+              <a:t>?</a:t>
+            </a:r>
+          </a:p>
+          <a:p>
+            <a:r>
+              <a:rPr lang="ko-KR" altLang="en-US" dirty="0"/>
+              <a:t>👉 이게 흐리면 </a:t>
+            </a:r>
+            <a:r>
+              <a:rPr lang="ko-KR" altLang="en-US" b="1" dirty="0"/>
+              <a:t>모든 모델이 실패</a:t>
+            </a:r>
+            <a:r>
+              <a:rPr lang="ko-KR" altLang="en-US" dirty="0"/>
+              <a:t>한다</a:t>
+            </a:r>
+            <a:r>
+              <a:rPr lang="en-US" altLang="ko-KR" dirty="0"/>
+              <a:t>.</a:t>
+            </a:r>
+          </a:p>
+          <a:p>
+            <a:endParaRPr lang="ko-KR" altLang="en-US" dirty="0"/>
+          </a:p>
+        </p:txBody>
+      </p:sp>
+      <p:sp>
+        <p:nvSpPr>
+          <p:cNvPr id="4" name="슬라이드 번호 개체 틀 3"/>
+          <p:cNvSpPr>
+            <a:spLocks noGrp="1"/>
+          </p:cNvSpPr>
+          <p:nvPr>
+            <p:ph type="sldNum" sz="quarter" idx="5"/>
+          </p:nvPr>
+        </p:nvSpPr>
+        <p:spPr/>
+        <p:txBody>
+          <a:bodyPr/>
+          <a:lstStyle/>
+          <a:p>
+            <a:fld id="{3E35EA20-6519-4513-9EDC-C89C5369BAEC}" type="slidenum">
+              <a:rPr lang="ko-KR" altLang="en-US" smtClean="0"/>
+              <a:pPr/>
+              <a:t>15</a:t>
+            </a:fld>
+            <a:endParaRPr lang="ko-KR" altLang="en-US" dirty="0"/>
+          </a:p>
+        </p:txBody>
+      </p:sp>
+    </p:spTree>
+    <p:extLst>
+      <p:ext uri="{BB962C8B-B14F-4D97-AF65-F5344CB8AC3E}">
+        <p14:creationId xmlns:p14="http://schemas.microsoft.com/office/powerpoint/2010/main" val="3560970469"/>
+      </p:ext>
+    </p:extLst>
+  </p:cSld>
+  <p:clrMapOvr>
+    <a:masterClrMapping/>
+  </p:clrMapOvr>
+</p:notes>
+</file>
+
+<file path=ppt/notesSlides/notesSlide7.xml><?xml version="1.0" encoding="utf-8"?>
+<p:notes xmlns:a="http://schemas.openxmlformats.org/drawingml/2006/main" xmlns:r="http://schemas.openxmlformats.org/officeDocument/2006/relationships" xmlns:p="http://schemas.openxmlformats.org/presentationml/2006/main">
+  <p:cSld>
+    <p:spTree>
+      <p:nvGrpSpPr>
+        <p:cNvPr id="1" name=""/>
+        <p:cNvGrpSpPr/>
+        <p:nvPr/>
+      </p:nvGrpSpPr>
+      <p:grpSpPr>
+        <a:xfrm>
+          <a:off x="0" y="0"/>
+          <a:ext cx="0" cy="0"/>
+          <a:chOff x="0" y="0"/>
+          <a:chExt cx="0" cy="0"/>
+        </a:xfrm>
+      </p:grpSpPr>
+      <p:sp>
+        <p:nvSpPr>
+          <p:cNvPr id="2" name="슬라이드 이미지 개체 틀 1"/>
+          <p:cNvSpPr>
+            <a:spLocks noGrp="1" noRot="1" noChangeAspect="1"/>
+          </p:cNvSpPr>
+          <p:nvPr>
+            <p:ph type="sldImg"/>
+          </p:nvPr>
+        </p:nvSpPr>
+        <p:spPr/>
+      </p:sp>
+      <p:sp>
+        <p:nvSpPr>
+          <p:cNvPr id="3" name="슬라이드 노트 개체 틀 2"/>
+          <p:cNvSpPr>
+            <a:spLocks noGrp="1"/>
+          </p:cNvSpPr>
+          <p:nvPr>
+            <p:ph type="body" idx="1"/>
+          </p:nvPr>
+        </p:nvSpPr>
+        <p:spPr/>
+        <p:txBody>
+          <a:bodyPr/>
+          <a:lstStyle/>
+          <a:p>
+            <a:r>
+              <a:rPr lang="ko-KR" altLang="en-US" b="1" dirty="0"/>
+              <a:t>🎤 강사 설명 포인트</a:t>
+            </a:r>
+          </a:p>
+          <a:p>
+            <a:r>
+              <a:rPr lang="ko-KR" altLang="en-US" dirty="0"/>
+              <a:t>“미래를 예측하는 문제에서</a:t>
+            </a:r>
+            <a:br>
+              <a:rPr lang="ko-KR" altLang="en-US" dirty="0"/>
+            </a:br>
+            <a:r>
+              <a:rPr lang="ko-KR" altLang="en-US" dirty="0"/>
+              <a:t>미래 데이터를 학습에 쓰면 안 됩니다</a:t>
+            </a:r>
+            <a:r>
+              <a:rPr lang="en-US" altLang="ko-KR" dirty="0"/>
+              <a:t>.”</a:t>
+            </a:r>
+          </a:p>
+          <a:p>
+            <a:r>
+              <a:rPr lang="ko-KR" altLang="en-US" dirty="0"/>
+              <a:t>👉 </a:t>
+            </a:r>
+            <a:r>
+              <a:rPr lang="ko-KR" altLang="en-US" b="1" dirty="0"/>
+              <a:t>실습 </a:t>
+            </a:r>
+            <a:r>
+              <a:rPr lang="en-US" altLang="ko-KR" b="1" dirty="0"/>
+              <a:t>2</a:t>
+            </a:r>
+            <a:r>
+              <a:rPr lang="ko-KR" altLang="en-US" b="1" dirty="0"/>
+              <a:t>에서 이미 경험한 내용</a:t>
+            </a:r>
+            <a:br>
+              <a:rPr lang="ko-KR" altLang="en-US" dirty="0"/>
+            </a:br>
+            <a:r>
+              <a:rPr lang="ko-KR" altLang="en-US" dirty="0"/>
+              <a:t>👉 여기서 다시 ‘</a:t>
+            </a:r>
+            <a:r>
+              <a:rPr lang="ko-KR" altLang="en-US" dirty="0" err="1"/>
+              <a:t>규칙’으로</a:t>
+            </a:r>
+            <a:r>
+              <a:rPr lang="ko-KR" altLang="en-US" dirty="0"/>
+              <a:t> 정리</a:t>
+            </a:r>
+          </a:p>
+          <a:p>
+            <a:endParaRPr lang="ko-KR" altLang="en-US" dirty="0"/>
+          </a:p>
+        </p:txBody>
+      </p:sp>
+      <p:sp>
+        <p:nvSpPr>
+          <p:cNvPr id="4" name="슬라이드 번호 개체 틀 3"/>
+          <p:cNvSpPr>
+            <a:spLocks noGrp="1"/>
+          </p:cNvSpPr>
+          <p:nvPr>
+            <p:ph type="sldNum" sz="quarter" idx="5"/>
+          </p:nvPr>
+        </p:nvSpPr>
+        <p:spPr/>
+        <p:txBody>
+          <a:bodyPr/>
+          <a:lstStyle/>
+          <a:p>
+            <a:fld id="{3E35EA20-6519-4513-9EDC-C89C5369BAEC}" type="slidenum">
+              <a:rPr lang="ko-KR" altLang="en-US" smtClean="0"/>
+              <a:pPr/>
+              <a:t>16</a:t>
+            </a:fld>
+            <a:endParaRPr lang="ko-KR" altLang="en-US" dirty="0"/>
+          </a:p>
+        </p:txBody>
+      </p:sp>
+    </p:spTree>
+    <p:extLst>
+      <p:ext uri="{BB962C8B-B14F-4D97-AF65-F5344CB8AC3E}">
+        <p14:creationId xmlns:p14="http://schemas.microsoft.com/office/powerpoint/2010/main" val="3554163627"/>
+      </p:ext>
+    </p:extLst>
+  </p:cSld>
+  <p:clrMapOvr>
+    <a:masterClrMapping/>
+  </p:clrMapOvr>
+</p:notes>
+</file>
+
+<file path=ppt/notesSlides/notesSlide8.xml><?xml version="1.0" encoding="utf-8"?>
+<p:notes xmlns:a="http://schemas.openxmlformats.org/drawingml/2006/main" xmlns:r="http://schemas.openxmlformats.org/officeDocument/2006/relationships" xmlns:p="http://schemas.openxmlformats.org/presentationml/2006/main">
+  <p:cSld>
+    <p:spTree>
+      <p:nvGrpSpPr>
+        <p:cNvPr id="1" name=""/>
+        <p:cNvGrpSpPr/>
+        <p:nvPr/>
+      </p:nvGrpSpPr>
+      <p:grpSpPr>
+        <a:xfrm>
+          <a:off x="0" y="0"/>
+          <a:ext cx="0" cy="0"/>
+          <a:chOff x="0" y="0"/>
+          <a:chExt cx="0" cy="0"/>
+        </a:xfrm>
+      </p:grpSpPr>
+      <p:sp>
+        <p:nvSpPr>
+          <p:cNvPr id="2" name="슬라이드 이미지 개체 틀 1"/>
+          <p:cNvSpPr>
+            <a:spLocks noGrp="1" noRot="1" noChangeAspect="1"/>
+          </p:cNvSpPr>
+          <p:nvPr>
+            <p:ph type="sldImg"/>
+          </p:nvPr>
+        </p:nvSpPr>
+        <p:spPr/>
+      </p:sp>
+      <p:sp>
+        <p:nvSpPr>
+          <p:cNvPr id="3" name="슬라이드 노트 개체 틀 2"/>
+          <p:cNvSpPr>
+            <a:spLocks noGrp="1"/>
+          </p:cNvSpPr>
+          <p:nvPr>
+            <p:ph type="body" idx="1"/>
+          </p:nvPr>
+        </p:nvSpPr>
+        <p:spPr/>
+        <p:txBody>
+          <a:bodyPr/>
+          <a:lstStyle/>
+          <a:p>
+            <a:r>
+              <a:rPr lang="ko-KR" altLang="en-US" b="1" dirty="0"/>
+              <a:t>🎤 강사 설명 포인트</a:t>
+            </a:r>
+          </a:p>
+          <a:p>
+            <a:r>
+              <a:rPr lang="ko-KR" altLang="en-US" dirty="0"/>
+              <a:t>“</a:t>
+            </a:r>
+            <a:r>
+              <a:rPr lang="ko-KR" altLang="en-US" dirty="0" err="1"/>
+              <a:t>셔플이</a:t>
+            </a:r>
+            <a:r>
+              <a:rPr lang="ko-KR" altLang="en-US" dirty="0"/>
+              <a:t> 나쁜 게 아니라</a:t>
+            </a:r>
+            <a:r>
+              <a:rPr lang="en-US" altLang="ko-KR" dirty="0"/>
+              <a:t>,</a:t>
+            </a:r>
+            <a:br>
+              <a:rPr lang="en-US" altLang="ko-KR" dirty="0"/>
+            </a:br>
+            <a:r>
+              <a:rPr lang="ko-KR" altLang="en-US" b="1" dirty="0"/>
+              <a:t>시계열에서는 맞지 않는 것</a:t>
+            </a:r>
+            <a:r>
+              <a:rPr lang="ko-KR" altLang="en-US" dirty="0"/>
+              <a:t>입니다</a:t>
+            </a:r>
+            <a:r>
+              <a:rPr lang="en-US" altLang="ko-KR"/>
+              <a:t>.”</a:t>
+            </a:r>
+          </a:p>
+          <a:p>
+            <a:endParaRPr lang="ko-KR" altLang="en-US"/>
+          </a:p>
+        </p:txBody>
+      </p:sp>
+      <p:sp>
+        <p:nvSpPr>
+          <p:cNvPr id="4" name="슬라이드 번호 개체 틀 3"/>
+          <p:cNvSpPr>
+            <a:spLocks noGrp="1"/>
+          </p:cNvSpPr>
+          <p:nvPr>
+            <p:ph type="sldNum" sz="quarter" idx="5"/>
+          </p:nvPr>
+        </p:nvSpPr>
+        <p:spPr/>
+        <p:txBody>
+          <a:bodyPr/>
+          <a:lstStyle/>
+          <a:p>
+            <a:fld id="{3E35EA20-6519-4513-9EDC-C89C5369BAEC}" type="slidenum">
+              <a:rPr lang="ko-KR" altLang="en-US" smtClean="0"/>
+              <a:pPr/>
+              <a:t>17</a:t>
+            </a:fld>
+            <a:endParaRPr lang="ko-KR" altLang="en-US" dirty="0"/>
+          </a:p>
+        </p:txBody>
+      </p:sp>
+    </p:spTree>
+    <p:extLst>
+      <p:ext uri="{BB962C8B-B14F-4D97-AF65-F5344CB8AC3E}">
+        <p14:creationId xmlns:p14="http://schemas.microsoft.com/office/powerpoint/2010/main" val="2990812774"/>
+      </p:ext>
+    </p:extLst>
+  </p:cSld>
+  <p:clrMapOvr>
+    <a:masterClrMapping/>
+  </p:clrMapOvr>
+</p:notes>
+</file>
+
+<file path=ppt/notesSlides/notesSlide9.xml><?xml version="1.0" encoding="utf-8"?>
+<p:notes xmlns:a="http://schemas.openxmlformats.org/drawingml/2006/main" xmlns:r="http://schemas.openxmlformats.org/officeDocument/2006/relationships" xmlns:p="http://schemas.openxmlformats.org/presentationml/2006/main">
+  <p:cSld>
+    <p:spTree>
+      <p:nvGrpSpPr>
         <p:cNvPr id="1" name="">
           <a:extLst>
             <a:ext uri="{FF2B5EF4-FFF2-40B4-BE49-F238E27FC236}">
@@ -1098,7 +1676,7 @@
           <a:p>
             <a:fld id="{A0085365-8376-4996-BDD6-F39608FADAF3}" type="slidenum">
               <a:rPr lang="ko-KR" altLang="en-US" smtClean="0"/>
-              <a:t>13</a:t>
+              <a:t>18</a:t>
             </a:fld>
             <a:endParaRPr lang="ko-KR" altLang="en-US"/>
           </a:p>
@@ -1264,7 +1842,7 @@
           <a:p>
             <a:fld id="{442BEE3F-2E9A-4FD8-8B8A-8619F3E161C0}" type="datetime1">
               <a:rPr lang="ko-KR" altLang="en-US" smtClean="0"/>
-              <a:t>2026-02-04</a:t>
+              <a:t>2026-02-05</a:t>
             </a:fld>
             <a:endParaRPr lang="ko-KR" altLang="en-US"/>
           </a:p>
@@ -1551,7 +2129,7 @@
           <a:p>
             <a:fld id="{0F78D9C4-20C1-4B15-A116-16DC77AD9A1E}" type="datetime1">
               <a:rPr lang="ko-KR" altLang="en-US" smtClean="0"/>
-              <a:t>2026-02-04</a:t>
+              <a:t>2026-02-05</a:t>
             </a:fld>
             <a:endParaRPr lang="ko-KR" altLang="en-US"/>
           </a:p>
@@ -1726,7 +2304,7 @@
           <a:p>
             <a:fld id="{7F5E23C3-0E3D-4E4E-8486-D7FB4C073DC1}" type="datetime1">
               <a:rPr lang="ko-KR" altLang="en-US" smtClean="0"/>
-              <a:t>2026-02-04</a:t>
+              <a:t>2026-02-05</a:t>
             </a:fld>
             <a:endParaRPr lang="ko-KR" altLang="en-US"/>
           </a:p>
@@ -1882,7 +2460,7 @@
           <a:p>
             <a:fld id="{7F5E23C3-0E3D-4E4E-8486-D7FB4C073DC1}" type="datetime1">
               <a:rPr lang="ko-KR" altLang="en-US" smtClean="0"/>
-              <a:t>2026-02-04</a:t>
+              <a:t>2026-02-05</a:t>
             </a:fld>
             <a:endParaRPr lang="ko-KR" altLang="en-US"/>
           </a:p>
@@ -2211,7 +2789,7 @@
           <a:p>
             <a:fld id="{7F5E23C3-0E3D-4E4E-8486-D7FB4C073DC1}" type="datetime1">
               <a:rPr lang="ko-KR" altLang="en-US" smtClean="0"/>
-              <a:t>2026-02-04</a:t>
+              <a:t>2026-02-05</a:t>
             </a:fld>
             <a:endParaRPr lang="ko-KR" altLang="en-US"/>
           </a:p>
@@ -3682,6 +4260,591 @@
 </file>
 
 <file path=ppt/slides/slide13.xml><?xml version="1.0" encoding="utf-8"?>
+<p:sld xmlns:a="http://schemas.openxmlformats.org/drawingml/2006/main" xmlns:r="http://schemas.openxmlformats.org/officeDocument/2006/relationships" xmlns:p="http://schemas.openxmlformats.org/presentationml/2006/main">
+  <p:cSld>
+    <p:spTree>
+      <p:nvGrpSpPr>
+        <p:cNvPr id="1" name=""/>
+        <p:cNvGrpSpPr/>
+        <p:nvPr/>
+      </p:nvGrpSpPr>
+      <p:grpSpPr>
+        <a:xfrm>
+          <a:off x="0" y="0"/>
+          <a:ext cx="0" cy="0"/>
+          <a:chOff x="0" y="0"/>
+          <a:chExt cx="0" cy="0"/>
+        </a:xfrm>
+      </p:grpSpPr>
+      <p:sp>
+        <p:nvSpPr>
+          <p:cNvPr id="2" name="제목 1">
+            <a:extLst>
+              <a:ext uri="{FF2B5EF4-FFF2-40B4-BE49-F238E27FC236}">
+                <a16:creationId xmlns:a16="http://schemas.microsoft.com/office/drawing/2014/main" id="{50CCC5C2-3737-2F36-D0C8-5D43EEB2D7D4}"/>
+              </a:ext>
+            </a:extLst>
+          </p:cNvPr>
+          <p:cNvSpPr>
+            <a:spLocks noGrp="1"/>
+          </p:cNvSpPr>
+          <p:nvPr>
+            <p:ph type="title"/>
+          </p:nvPr>
+        </p:nvSpPr>
+        <p:spPr/>
+        <p:txBody>
+          <a:bodyPr/>
+          <a:lstStyle/>
+          <a:p>
+            <a:r>
+              <a:rPr lang="ko-KR" altLang="en-US" dirty="0"/>
+              <a:t>시계열 예측</a:t>
+            </a:r>
+          </a:p>
+        </p:txBody>
+      </p:sp>
+    </p:spTree>
+    <p:extLst>
+      <p:ext uri="{BB962C8B-B14F-4D97-AF65-F5344CB8AC3E}">
+        <p14:creationId xmlns:p14="http://schemas.microsoft.com/office/powerpoint/2010/main" val="3709158968"/>
+      </p:ext>
+    </p:extLst>
+  </p:cSld>
+  <p:clrMapOvr>
+    <a:masterClrMapping/>
+  </p:clrMapOvr>
+</p:sld>
+</file>
+
+<file path=ppt/slides/slide14.xml><?xml version="1.0" encoding="utf-8"?>
+<p:sld xmlns:a="http://schemas.openxmlformats.org/drawingml/2006/main" xmlns:r="http://schemas.openxmlformats.org/officeDocument/2006/relationships" xmlns:p="http://schemas.openxmlformats.org/presentationml/2006/main">
+  <p:cSld>
+    <p:spTree>
+      <p:nvGrpSpPr>
+        <p:cNvPr id="1" name=""/>
+        <p:cNvGrpSpPr/>
+        <p:nvPr/>
+      </p:nvGrpSpPr>
+      <p:grpSpPr>
+        <a:xfrm>
+          <a:off x="0" y="0"/>
+          <a:ext cx="0" cy="0"/>
+          <a:chOff x="0" y="0"/>
+          <a:chExt cx="0" cy="0"/>
+        </a:xfrm>
+      </p:grpSpPr>
+      <p:sp>
+        <p:nvSpPr>
+          <p:cNvPr id="2" name="제목 1">
+            <a:extLst>
+              <a:ext uri="{FF2B5EF4-FFF2-40B4-BE49-F238E27FC236}">
+                <a16:creationId xmlns:a16="http://schemas.microsoft.com/office/drawing/2014/main" id="{2F8EE5D1-F0B4-30A5-8E53-E1FF97E889E6}"/>
+              </a:ext>
+            </a:extLst>
+          </p:cNvPr>
+          <p:cNvSpPr>
+            <a:spLocks noGrp="1"/>
+          </p:cNvSpPr>
+          <p:nvPr>
+            <p:ph type="title"/>
+          </p:nvPr>
+        </p:nvSpPr>
+        <p:spPr/>
+        <p:txBody>
+          <a:bodyPr/>
+          <a:lstStyle/>
+          <a:p>
+            <a:r>
+              <a:rPr lang="ko-KR" altLang="en-US" dirty="0"/>
+              <a:t>시계열 예측 문제 정의하기</a:t>
+            </a:r>
+          </a:p>
+        </p:txBody>
+      </p:sp>
+      <p:sp>
+        <p:nvSpPr>
+          <p:cNvPr id="3" name="내용 개체 틀 2">
+            <a:extLst>
+              <a:ext uri="{FF2B5EF4-FFF2-40B4-BE49-F238E27FC236}">
+                <a16:creationId xmlns:a16="http://schemas.microsoft.com/office/drawing/2014/main" id="{DBD14EE1-E07F-E9E4-1D72-44F3C236FD62}"/>
+              </a:ext>
+            </a:extLst>
+          </p:cNvPr>
+          <p:cNvSpPr>
+            <a:spLocks noGrp="1"/>
+          </p:cNvSpPr>
+          <p:nvPr>
+            <p:ph idx="1"/>
+          </p:nvPr>
+        </p:nvSpPr>
+        <p:spPr/>
+        <p:txBody>
+          <a:bodyPr/>
+          <a:lstStyle/>
+          <a:p>
+            <a:r>
+              <a:rPr lang="ko-KR" altLang="en-US" dirty="0"/>
+              <a:t>시계열 분석의 목적은 미래의 값을 예측하는 것</a:t>
+            </a:r>
+            <a:endParaRPr lang="en-US" altLang="ko-KR" dirty="0"/>
+          </a:p>
+          <a:p>
+            <a:r>
+              <a:rPr lang="ko-KR" altLang="en-US" dirty="0"/>
+              <a:t>예측을 위해서는 질문을 명확히 정의해야 함</a:t>
+            </a:r>
+            <a:endParaRPr lang="en-US" altLang="ko-KR" dirty="0"/>
+          </a:p>
+          <a:p>
+            <a:r>
+              <a:rPr lang="ko-KR" altLang="en-US" dirty="0"/>
+              <a:t>모든 시계열 데이터가 자동으로 예측 문제가 되지는 않음</a:t>
+            </a:r>
+            <a:endParaRPr lang="en-US" altLang="ko-KR" dirty="0"/>
+          </a:p>
+          <a:p>
+            <a:r>
+              <a:rPr lang="ko-KR" altLang="en-US" dirty="0"/>
+              <a:t>예측이 필요한 경우</a:t>
+            </a:r>
+          </a:p>
+          <a:p>
+            <a:pPr lvl="1"/>
+            <a:r>
+              <a:rPr lang="ko-KR" altLang="en-US" dirty="0"/>
+              <a:t>발전량을 미리 알아야 운영 계획을 세울 때</a:t>
+            </a:r>
+          </a:p>
+          <a:p>
+            <a:pPr lvl="1"/>
+            <a:r>
+              <a:rPr lang="ko-KR" altLang="en-US" dirty="0"/>
+              <a:t>수요를 예측해서 공급을 조절할 때</a:t>
+            </a:r>
+          </a:p>
+          <a:p>
+            <a:pPr lvl="1"/>
+            <a:r>
+              <a:rPr lang="ko-KR" altLang="en-US" dirty="0"/>
+              <a:t>미리 대비해야 할 의사결정이 있을 때</a:t>
+            </a:r>
+          </a:p>
+          <a:p>
+            <a:endParaRPr lang="ko-KR" altLang="en-US" dirty="0"/>
+          </a:p>
+        </p:txBody>
+      </p:sp>
+    </p:spTree>
+    <p:extLst>
+      <p:ext uri="{BB962C8B-B14F-4D97-AF65-F5344CB8AC3E}">
+        <p14:creationId xmlns:p14="http://schemas.microsoft.com/office/powerpoint/2010/main" val="850573134"/>
+      </p:ext>
+    </p:extLst>
+  </p:cSld>
+  <p:clrMapOvr>
+    <a:masterClrMapping/>
+  </p:clrMapOvr>
+</p:sld>
+</file>
+
+<file path=ppt/slides/slide15.xml><?xml version="1.0" encoding="utf-8"?>
+<p:sld xmlns:a="http://schemas.openxmlformats.org/drawingml/2006/main" xmlns:r="http://schemas.openxmlformats.org/officeDocument/2006/relationships" xmlns:p="http://schemas.openxmlformats.org/presentationml/2006/main">
+  <p:cSld>
+    <p:spTree>
+      <p:nvGrpSpPr>
+        <p:cNvPr id="1" name=""/>
+        <p:cNvGrpSpPr/>
+        <p:nvPr/>
+      </p:nvGrpSpPr>
+      <p:grpSpPr>
+        <a:xfrm>
+          <a:off x="0" y="0"/>
+          <a:ext cx="0" cy="0"/>
+          <a:chOff x="0" y="0"/>
+          <a:chExt cx="0" cy="0"/>
+        </a:xfrm>
+      </p:grpSpPr>
+      <p:sp>
+        <p:nvSpPr>
+          <p:cNvPr id="2" name="제목 1">
+            <a:extLst>
+              <a:ext uri="{FF2B5EF4-FFF2-40B4-BE49-F238E27FC236}">
+                <a16:creationId xmlns:a16="http://schemas.microsoft.com/office/drawing/2014/main" id="{A97B911C-8133-273C-B49A-09698AA3A926}"/>
+              </a:ext>
+            </a:extLst>
+          </p:cNvPr>
+          <p:cNvSpPr>
+            <a:spLocks noGrp="1"/>
+          </p:cNvSpPr>
+          <p:nvPr>
+            <p:ph type="title"/>
+          </p:nvPr>
+        </p:nvSpPr>
+        <p:spPr/>
+        <p:txBody>
+          <a:bodyPr/>
+          <a:lstStyle/>
+          <a:p>
+            <a:r>
+              <a:rPr lang="ko-KR" altLang="en-US" dirty="0"/>
+              <a:t>무엇을 예측할 것인가</a:t>
+            </a:r>
+            <a:r>
+              <a:rPr lang="en-US" altLang="ko-KR" dirty="0"/>
+              <a:t>?</a:t>
+            </a:r>
+            <a:endParaRPr lang="ko-KR" altLang="en-US" dirty="0"/>
+          </a:p>
+        </p:txBody>
+      </p:sp>
+      <p:sp>
+        <p:nvSpPr>
+          <p:cNvPr id="3" name="내용 개체 틀 2">
+            <a:extLst>
+              <a:ext uri="{FF2B5EF4-FFF2-40B4-BE49-F238E27FC236}">
+                <a16:creationId xmlns:a16="http://schemas.microsoft.com/office/drawing/2014/main" id="{314DD698-3CD6-4B79-B13C-A6461E727B7C}"/>
+              </a:ext>
+            </a:extLst>
+          </p:cNvPr>
+          <p:cNvSpPr>
+            <a:spLocks noGrp="1"/>
+          </p:cNvSpPr>
+          <p:nvPr>
+            <p:ph idx="1"/>
+          </p:nvPr>
+        </p:nvSpPr>
+        <p:spPr/>
+        <p:txBody>
+          <a:bodyPr/>
+          <a:lstStyle/>
+          <a:p>
+            <a:r>
+              <a:rPr lang="ko-KR" altLang="en-US" dirty="0"/>
+              <a:t>예측 대상</a:t>
+            </a:r>
+            <a:r>
+              <a:rPr lang="en-US" altLang="ko-KR" dirty="0"/>
+              <a:t>: </a:t>
+            </a:r>
+            <a:r>
+              <a:rPr lang="ko-KR" altLang="en-US" dirty="0"/>
+              <a:t>시간 기준으로 정의</a:t>
+            </a:r>
+            <a:endParaRPr lang="en-US" altLang="ko-KR" dirty="0"/>
+          </a:p>
+          <a:p>
+            <a:r>
+              <a:rPr lang="ko-KR" altLang="en-US" dirty="0"/>
+              <a:t>예시</a:t>
+            </a:r>
+            <a:endParaRPr lang="en-US" altLang="ko-KR" dirty="0"/>
+          </a:p>
+          <a:p>
+            <a:pPr lvl="1"/>
+            <a:r>
+              <a:rPr lang="ko-KR" altLang="en-US" dirty="0"/>
+              <a:t>다음 </a:t>
+            </a:r>
+            <a:r>
+              <a:rPr lang="en-US" altLang="ko-KR" dirty="0"/>
+              <a:t>1</a:t>
+            </a:r>
+            <a:r>
+              <a:rPr lang="ko-KR" altLang="en-US" dirty="0"/>
+              <a:t>시간 발전량</a:t>
+            </a:r>
+            <a:endParaRPr lang="en-US" altLang="ko-KR" dirty="0"/>
+          </a:p>
+          <a:p>
+            <a:pPr lvl="1"/>
+            <a:r>
+              <a:rPr lang="ko-KR" altLang="en-US" dirty="0"/>
+              <a:t>다음 날 평균 발전량</a:t>
+            </a:r>
+            <a:endParaRPr lang="en-US" altLang="ko-KR" dirty="0"/>
+          </a:p>
+          <a:p>
+            <a:pPr lvl="1"/>
+            <a:r>
+              <a:rPr lang="ko-KR" altLang="en-US" dirty="0"/>
+              <a:t>특정 시간대의 발전량</a:t>
+            </a:r>
+          </a:p>
+        </p:txBody>
+      </p:sp>
+    </p:spTree>
+    <p:extLst>
+      <p:ext uri="{BB962C8B-B14F-4D97-AF65-F5344CB8AC3E}">
+        <p14:creationId xmlns:p14="http://schemas.microsoft.com/office/powerpoint/2010/main" val="2220372970"/>
+      </p:ext>
+    </p:extLst>
+  </p:cSld>
+  <p:clrMapOvr>
+    <a:masterClrMapping/>
+  </p:clrMapOvr>
+</p:sld>
+</file>
+
+<file path=ppt/slides/slide16.xml><?xml version="1.0" encoding="utf-8"?>
+<p:sld xmlns:a="http://schemas.openxmlformats.org/drawingml/2006/main" xmlns:r="http://schemas.openxmlformats.org/officeDocument/2006/relationships" xmlns:p="http://schemas.openxmlformats.org/presentationml/2006/main">
+  <p:cSld>
+    <p:spTree>
+      <p:nvGrpSpPr>
+        <p:cNvPr id="1" name=""/>
+        <p:cNvGrpSpPr/>
+        <p:nvPr/>
+      </p:nvGrpSpPr>
+      <p:grpSpPr>
+        <a:xfrm>
+          <a:off x="0" y="0"/>
+          <a:ext cx="0" cy="0"/>
+          <a:chOff x="0" y="0"/>
+          <a:chExt cx="0" cy="0"/>
+        </a:xfrm>
+      </p:grpSpPr>
+      <p:sp>
+        <p:nvSpPr>
+          <p:cNvPr id="2" name="제목 1">
+            <a:extLst>
+              <a:ext uri="{FF2B5EF4-FFF2-40B4-BE49-F238E27FC236}">
+                <a16:creationId xmlns:a16="http://schemas.microsoft.com/office/drawing/2014/main" id="{83E50052-3E97-08FA-6C53-D11DCD946245}"/>
+              </a:ext>
+            </a:extLst>
+          </p:cNvPr>
+          <p:cNvSpPr>
+            <a:spLocks noGrp="1"/>
+          </p:cNvSpPr>
+          <p:nvPr>
+            <p:ph type="title"/>
+          </p:nvPr>
+        </p:nvSpPr>
+        <p:spPr/>
+        <p:txBody>
+          <a:bodyPr/>
+          <a:lstStyle/>
+          <a:p>
+            <a:r>
+              <a:rPr lang="ko-KR" altLang="en-US" dirty="0"/>
+              <a:t>시간 기반 데이터 분할</a:t>
+            </a:r>
+          </a:p>
+        </p:txBody>
+      </p:sp>
+      <p:sp>
+        <p:nvSpPr>
+          <p:cNvPr id="3" name="내용 개체 틀 2">
+            <a:extLst>
+              <a:ext uri="{FF2B5EF4-FFF2-40B4-BE49-F238E27FC236}">
+                <a16:creationId xmlns:a16="http://schemas.microsoft.com/office/drawing/2014/main" id="{9C5AF06C-7678-A376-4367-0551753B6C19}"/>
+              </a:ext>
+            </a:extLst>
+          </p:cNvPr>
+          <p:cNvSpPr>
+            <a:spLocks noGrp="1"/>
+          </p:cNvSpPr>
+          <p:nvPr>
+            <p:ph idx="1"/>
+          </p:nvPr>
+        </p:nvSpPr>
+        <p:spPr/>
+        <p:txBody>
+          <a:bodyPr/>
+          <a:lstStyle/>
+          <a:p>
+            <a:r>
+              <a:rPr lang="ko-KR" altLang="en-US" dirty="0"/>
+              <a:t>시계열 데이터는 시간 순서를 반드시 유지해야 함</a:t>
+            </a:r>
+            <a:endParaRPr lang="en-US" altLang="ko-KR" dirty="0"/>
+          </a:p>
+          <a:p>
+            <a:r>
+              <a:rPr lang="ko-KR" altLang="en-US" dirty="0"/>
+              <a:t>데이터 분할 방식</a:t>
+            </a:r>
+            <a:endParaRPr lang="en-US" altLang="ko-KR" dirty="0"/>
+          </a:p>
+          <a:p>
+            <a:pPr lvl="1"/>
+            <a:r>
+              <a:rPr lang="ko-KR" altLang="en-US" dirty="0"/>
+              <a:t>과거 </a:t>
+            </a:r>
+            <a:r>
+              <a:rPr lang="en-US" altLang="ko-KR" dirty="0"/>
+              <a:t>-&gt; </a:t>
+            </a:r>
+            <a:r>
+              <a:rPr lang="ko-KR" altLang="en-US" dirty="0"/>
+              <a:t>학습</a:t>
+            </a:r>
+            <a:endParaRPr lang="en-US" altLang="ko-KR" dirty="0"/>
+          </a:p>
+          <a:p>
+            <a:pPr lvl="1"/>
+            <a:r>
+              <a:rPr lang="ko-KR" altLang="en-US" dirty="0"/>
+              <a:t>미래 </a:t>
+            </a:r>
+            <a:r>
+              <a:rPr lang="en-US" altLang="ko-KR" dirty="0"/>
+              <a:t>-&gt; </a:t>
+            </a:r>
+            <a:r>
+              <a:rPr lang="ko-KR" altLang="en-US" dirty="0"/>
+              <a:t>평가</a:t>
+            </a:r>
+          </a:p>
+        </p:txBody>
+      </p:sp>
+    </p:spTree>
+    <p:extLst>
+      <p:ext uri="{BB962C8B-B14F-4D97-AF65-F5344CB8AC3E}">
+        <p14:creationId xmlns:p14="http://schemas.microsoft.com/office/powerpoint/2010/main" val="645153963"/>
+      </p:ext>
+    </p:extLst>
+  </p:cSld>
+  <p:clrMapOvr>
+    <a:masterClrMapping/>
+  </p:clrMapOvr>
+</p:sld>
+</file>
+
+<file path=ppt/slides/slide17.xml><?xml version="1.0" encoding="utf-8"?>
+<p:sld xmlns:a="http://schemas.openxmlformats.org/drawingml/2006/main" xmlns:r="http://schemas.openxmlformats.org/officeDocument/2006/relationships" xmlns:p="http://schemas.openxmlformats.org/presentationml/2006/main">
+  <p:cSld>
+    <p:spTree>
+      <p:nvGrpSpPr>
+        <p:cNvPr id="1" name=""/>
+        <p:cNvGrpSpPr/>
+        <p:nvPr/>
+      </p:nvGrpSpPr>
+      <p:grpSpPr>
+        <a:xfrm>
+          <a:off x="0" y="0"/>
+          <a:ext cx="0" cy="0"/>
+          <a:chOff x="0" y="0"/>
+          <a:chExt cx="0" cy="0"/>
+        </a:xfrm>
+      </p:grpSpPr>
+      <p:sp>
+        <p:nvSpPr>
+          <p:cNvPr id="2" name="제목 1">
+            <a:extLst>
+              <a:ext uri="{FF2B5EF4-FFF2-40B4-BE49-F238E27FC236}">
+                <a16:creationId xmlns:a16="http://schemas.microsoft.com/office/drawing/2014/main" id="{03E13DA4-D2AC-80D3-3C1F-D639951AF4C5}"/>
+              </a:ext>
+            </a:extLst>
+          </p:cNvPr>
+          <p:cNvSpPr>
+            <a:spLocks noGrp="1"/>
+          </p:cNvSpPr>
+          <p:nvPr>
+            <p:ph type="title"/>
+          </p:nvPr>
+        </p:nvSpPr>
+        <p:spPr/>
+        <p:txBody>
+          <a:bodyPr/>
+          <a:lstStyle/>
+          <a:p>
+            <a:r>
+              <a:rPr lang="ko-KR" altLang="en-US" dirty="0"/>
+              <a:t>잘못된 분할 </a:t>
+            </a:r>
+            <a:r>
+              <a:rPr lang="en-US" altLang="ko-KR" dirty="0"/>
+              <a:t>vs </a:t>
+            </a:r>
+            <a:r>
+              <a:rPr lang="ko-KR" altLang="en-US" dirty="0"/>
+              <a:t>올바른 분할</a:t>
+            </a:r>
+          </a:p>
+        </p:txBody>
+      </p:sp>
+      <p:sp>
+        <p:nvSpPr>
+          <p:cNvPr id="3" name="내용 개체 틀 2">
+            <a:extLst>
+              <a:ext uri="{FF2B5EF4-FFF2-40B4-BE49-F238E27FC236}">
+                <a16:creationId xmlns:a16="http://schemas.microsoft.com/office/drawing/2014/main" id="{958CB43A-A802-6C1D-E531-CB5ADEEE5CE7}"/>
+              </a:ext>
+            </a:extLst>
+          </p:cNvPr>
+          <p:cNvSpPr>
+            <a:spLocks noGrp="1"/>
+          </p:cNvSpPr>
+          <p:nvPr>
+            <p:ph idx="1"/>
+          </p:nvPr>
+        </p:nvSpPr>
+        <p:spPr/>
+        <p:txBody>
+          <a:bodyPr/>
+          <a:lstStyle/>
+          <a:p>
+            <a:r>
+              <a:rPr lang="ko-KR" altLang="en-US" dirty="0"/>
+              <a:t>랜덤 분할</a:t>
+            </a:r>
+            <a:endParaRPr lang="en-US" altLang="ko-KR" dirty="0"/>
+          </a:p>
+          <a:p>
+            <a:pPr lvl="1"/>
+            <a:r>
+              <a:rPr lang="ko-KR" altLang="en-US" dirty="0"/>
+              <a:t>미래 정보가 섞일 수 있음</a:t>
+            </a:r>
+            <a:endParaRPr lang="en-US" altLang="ko-KR" dirty="0"/>
+          </a:p>
+          <a:p>
+            <a:pPr lvl="1"/>
+            <a:r>
+              <a:rPr lang="ko-KR" altLang="en-US" dirty="0"/>
+              <a:t>현실을 반영하지 못함</a:t>
+            </a:r>
+            <a:endParaRPr lang="en-US" altLang="ko-KR" dirty="0"/>
+          </a:p>
+          <a:p>
+            <a:r>
+              <a:rPr lang="ko-KR" altLang="en-US" dirty="0"/>
+              <a:t>시간 기반 분할</a:t>
+            </a:r>
+            <a:endParaRPr lang="en-US" altLang="ko-KR" dirty="0"/>
+          </a:p>
+          <a:p>
+            <a:pPr lvl="1"/>
+            <a:r>
+              <a:rPr lang="ko-KR" altLang="en-US" dirty="0"/>
+              <a:t>실제 예측 상황과 동일</a:t>
+            </a:r>
+            <a:endParaRPr lang="en-US" altLang="ko-KR" dirty="0"/>
+          </a:p>
+          <a:p>
+            <a:pPr lvl="1"/>
+            <a:r>
+              <a:rPr lang="ko-KR" altLang="en-US" dirty="0"/>
+              <a:t>평가 결과를 신뢰할 수 있음</a:t>
+            </a:r>
+          </a:p>
+        </p:txBody>
+      </p:sp>
+    </p:spTree>
+    <p:extLst>
+      <p:ext uri="{BB962C8B-B14F-4D97-AF65-F5344CB8AC3E}">
+        <p14:creationId xmlns:p14="http://schemas.microsoft.com/office/powerpoint/2010/main" val="2447286524"/>
+      </p:ext>
+    </p:extLst>
+  </p:cSld>
+  <p:clrMapOvr>
+    <a:masterClrMapping/>
+  </p:clrMapOvr>
+</p:sld>
+</file>
+
+<file path=ppt/slides/slide18.xml><?xml version="1.0" encoding="utf-8"?>
 <p:sld xmlns:a="http://schemas.openxmlformats.org/drawingml/2006/main" xmlns:r="http://schemas.openxmlformats.org/officeDocument/2006/relationships" xmlns:p="http://schemas.openxmlformats.org/presentationml/2006/main">
   <p:cSld>
     <p:spTree>

--- a/material/5_AI/05_시계열 분석.pptx
+++ b/material/5_AI/05_시계열 분석.pptx
@@ -5,7 +5,7 @@
     <p:sldMasterId id="2147483660" r:id="rId1"/>
   </p:sldMasterIdLst>
   <p:notesMasterIdLst>
-    <p:notesMasterId r:id="rId20"/>
+    <p:notesMasterId r:id="rId24"/>
   </p:notesMasterIdLst>
   <p:sldIdLst>
     <p:sldId id="1020" r:id="rId2"/>
@@ -25,7 +25,11 @@
     <p:sldId id="1048" r:id="rId16"/>
     <p:sldId id="1049" r:id="rId17"/>
     <p:sldId id="1050" r:id="rId18"/>
-    <p:sldId id="836" r:id="rId19"/>
+    <p:sldId id="1051" r:id="rId19"/>
+    <p:sldId id="1052" r:id="rId20"/>
+    <p:sldId id="1053" r:id="rId21"/>
+    <p:sldId id="1054" r:id="rId22"/>
+    <p:sldId id="836" r:id="rId23"/>
   </p:sldIdLst>
   <p:sldSz cx="12192000" cy="6858000"/>
   <p:notesSz cx="6858000" cy="9144000"/>
@@ -235,7 +239,7 @@
             <a:fld id="{A13A867C-D490-40C2-AB8D-A60FA70A9BF5}" type="datetimeFigureOut">
               <a:rPr lang="ko-KR" altLang="en-US" smtClean="0"/>
               <a:pPr/>
-              <a:t>2026-02-05</a:t>
+              <a:t>2026-02-06</a:t>
             </a:fld>
             <a:endParaRPr lang="ko-KR" altLang="en-US" dirty="0"/>
           </a:p>
@@ -610,6 +614,398 @@
 </p:notes>
 </file>
 
+<file path=ppt/notesSlides/notesSlide10.xml><?xml version="1.0" encoding="utf-8"?>
+<p:notes xmlns:a="http://schemas.openxmlformats.org/drawingml/2006/main" xmlns:r="http://schemas.openxmlformats.org/officeDocument/2006/relationships" xmlns:p="http://schemas.openxmlformats.org/presentationml/2006/main">
+  <p:cSld>
+    <p:spTree>
+      <p:nvGrpSpPr>
+        <p:cNvPr id="1" name=""/>
+        <p:cNvGrpSpPr/>
+        <p:nvPr/>
+      </p:nvGrpSpPr>
+      <p:grpSpPr>
+        <a:xfrm>
+          <a:off x="0" y="0"/>
+          <a:ext cx="0" cy="0"/>
+          <a:chOff x="0" y="0"/>
+          <a:chExt cx="0" cy="0"/>
+        </a:xfrm>
+      </p:grpSpPr>
+      <p:sp>
+        <p:nvSpPr>
+          <p:cNvPr id="2" name="슬라이드 이미지 개체 틀 1"/>
+          <p:cNvSpPr>
+            <a:spLocks noGrp="1" noRot="1" noChangeAspect="1"/>
+          </p:cNvSpPr>
+          <p:nvPr>
+            <p:ph type="sldImg"/>
+          </p:nvPr>
+        </p:nvSpPr>
+        <p:spPr/>
+      </p:sp>
+      <p:sp>
+        <p:nvSpPr>
+          <p:cNvPr id="3" name="슬라이드 노트 개체 틀 2"/>
+          <p:cNvSpPr>
+            <a:spLocks noGrp="1"/>
+          </p:cNvSpPr>
+          <p:nvPr>
+            <p:ph type="body" idx="1"/>
+          </p:nvPr>
+        </p:nvSpPr>
+        <p:spPr/>
+        <p:txBody>
+          <a:bodyPr/>
+          <a:lstStyle/>
+          <a:p>
+            <a:r>
+              <a:rPr lang="ko-KR" altLang="en-US" dirty="0"/>
+              <a:t>“</a:t>
+            </a:r>
+            <a:r>
+              <a:rPr lang="en-US" altLang="ko-KR" dirty="0"/>
+              <a:t>ARIMA</a:t>
+            </a:r>
+            <a:r>
+              <a:rPr lang="ko-KR" altLang="en-US" dirty="0"/>
+              <a:t>를 써도</a:t>
+            </a:r>
+            <a:r>
+              <a:rPr lang="en-US" altLang="ko-KR" dirty="0"/>
+              <a:t>, </a:t>
+            </a:r>
+            <a:r>
+              <a:rPr lang="ko-KR" altLang="en-US" dirty="0" err="1"/>
+              <a:t>딥러닝을</a:t>
+            </a:r>
+            <a:r>
+              <a:rPr lang="ko-KR" altLang="en-US" dirty="0"/>
+              <a:t> 써도</a:t>
+            </a:r>
+            <a:r>
+              <a:rPr lang="en-US" altLang="ko-KR" dirty="0"/>
+              <a:t>, </a:t>
+            </a:r>
+            <a:r>
+              <a:rPr lang="ko-KR" altLang="en-US" dirty="0"/>
+              <a:t>시간 규칙은 바뀌지 않습니다</a:t>
+            </a:r>
+            <a:r>
+              <a:rPr lang="en-US" altLang="ko-KR" dirty="0"/>
+              <a:t>.” </a:t>
+            </a:r>
+            <a:r>
+              <a:rPr lang="ko-KR" altLang="en-US" dirty="0"/>
+              <a:t>👉 시계열 ≠ </a:t>
+            </a:r>
+            <a:r>
+              <a:rPr lang="en-US" altLang="ko-KR" dirty="0"/>
+              <a:t>LSTM </a:t>
+            </a:r>
+            <a:r>
+              <a:rPr lang="ko-KR" altLang="en-US" dirty="0"/>
+              <a:t>👉 이 오해를 여기서 반드시 끊어야 함</a:t>
+            </a:r>
+            <a:endParaRPr lang="en-US" altLang="ko-KR" dirty="0"/>
+          </a:p>
+          <a:p>
+            <a:endParaRPr lang="en-US" altLang="ko-KR" dirty="0"/>
+          </a:p>
+          <a:p>
+            <a:r>
+              <a:rPr lang="ko-KR" altLang="en-US" dirty="0"/>
+              <a:t>시간 규칙이란</a:t>
+            </a:r>
+            <a:br>
+              <a:rPr lang="ko-KR" altLang="en-US" dirty="0"/>
+            </a:br>
+            <a:r>
+              <a:rPr lang="ko-KR" altLang="en-US" dirty="0"/>
+              <a:t>‘그 시점에 실제로 알 수 있었던 정보만으로</a:t>
+            </a:r>
+            <a:br>
+              <a:rPr lang="ko-KR" altLang="en-US" dirty="0"/>
+            </a:br>
+            <a:r>
+              <a:rPr lang="ko-KR" altLang="en-US" dirty="0"/>
+              <a:t>미래를 예측해야 </a:t>
+            </a:r>
+            <a:r>
+              <a:rPr lang="ko-KR" altLang="en-US" dirty="0" err="1"/>
+              <a:t>한다’는</a:t>
+            </a:r>
+            <a:r>
+              <a:rPr lang="ko-KR" altLang="en-US" dirty="0"/>
+              <a:t> 분석의 기본 원칙이다</a:t>
+            </a:r>
+            <a:r>
+              <a:rPr lang="en-US" altLang="ko-KR" dirty="0"/>
+              <a:t>.</a:t>
+            </a:r>
+            <a:endParaRPr lang="ko-KR" altLang="en-US" dirty="0"/>
+          </a:p>
+        </p:txBody>
+      </p:sp>
+      <p:sp>
+        <p:nvSpPr>
+          <p:cNvPr id="4" name="슬라이드 번호 개체 틀 3"/>
+          <p:cNvSpPr>
+            <a:spLocks noGrp="1"/>
+          </p:cNvSpPr>
+          <p:nvPr>
+            <p:ph type="sldNum" sz="quarter" idx="5"/>
+          </p:nvPr>
+        </p:nvSpPr>
+        <p:spPr/>
+        <p:txBody>
+          <a:bodyPr/>
+          <a:lstStyle/>
+          <a:p>
+            <a:fld id="{3E35EA20-6519-4513-9EDC-C89C5369BAEC}" type="slidenum">
+              <a:rPr lang="ko-KR" altLang="en-US" smtClean="0"/>
+              <a:pPr/>
+              <a:t>19</a:t>
+            </a:fld>
+            <a:endParaRPr lang="ko-KR" altLang="en-US" dirty="0"/>
+          </a:p>
+        </p:txBody>
+      </p:sp>
+    </p:spTree>
+    <p:extLst>
+      <p:ext uri="{BB962C8B-B14F-4D97-AF65-F5344CB8AC3E}">
+        <p14:creationId xmlns:p14="http://schemas.microsoft.com/office/powerpoint/2010/main" val="3724902307"/>
+      </p:ext>
+    </p:extLst>
+  </p:cSld>
+  <p:clrMapOvr>
+    <a:masterClrMapping/>
+  </p:clrMapOvr>
+</p:notes>
+</file>
+
+<file path=ppt/notesSlides/notesSlide11.xml><?xml version="1.0" encoding="utf-8"?>
+<p:notes xmlns:a="http://schemas.openxmlformats.org/drawingml/2006/main" xmlns:r="http://schemas.openxmlformats.org/officeDocument/2006/relationships" xmlns:p="http://schemas.openxmlformats.org/presentationml/2006/main">
+  <p:cSld>
+    <p:spTree>
+      <p:nvGrpSpPr>
+        <p:cNvPr id="1" name=""/>
+        <p:cNvGrpSpPr/>
+        <p:nvPr/>
+      </p:nvGrpSpPr>
+      <p:grpSpPr>
+        <a:xfrm>
+          <a:off x="0" y="0"/>
+          <a:ext cx="0" cy="0"/>
+          <a:chOff x="0" y="0"/>
+          <a:chExt cx="0" cy="0"/>
+        </a:xfrm>
+      </p:grpSpPr>
+      <p:sp>
+        <p:nvSpPr>
+          <p:cNvPr id="2" name="슬라이드 이미지 개체 틀 1"/>
+          <p:cNvSpPr>
+            <a:spLocks noGrp="1" noRot="1" noChangeAspect="1"/>
+          </p:cNvSpPr>
+          <p:nvPr>
+            <p:ph type="sldImg"/>
+          </p:nvPr>
+        </p:nvSpPr>
+        <p:spPr/>
+      </p:sp>
+      <p:sp>
+        <p:nvSpPr>
+          <p:cNvPr id="3" name="슬라이드 노트 개체 틀 2"/>
+          <p:cNvSpPr>
+            <a:spLocks noGrp="1"/>
+          </p:cNvSpPr>
+          <p:nvPr>
+            <p:ph type="body" idx="1"/>
+          </p:nvPr>
+        </p:nvSpPr>
+        <p:spPr/>
+        <p:txBody>
+          <a:bodyPr/>
+          <a:lstStyle/>
+          <a:p>
+            <a:r>
+              <a:rPr lang="ko-KR" altLang="en-US" dirty="0"/>
+              <a:t>시계열 분석은</a:t>
+            </a:r>
+            <a:br>
+              <a:rPr lang="ko-KR" altLang="en-US" dirty="0"/>
+            </a:br>
+            <a:r>
+              <a:rPr lang="ko-KR" altLang="en-US" dirty="0"/>
+              <a:t>예측 문제를 올바르게 정의하고</a:t>
+            </a:r>
+            <a:r>
+              <a:rPr lang="en-US" altLang="ko-KR" dirty="0"/>
+              <a:t>,</a:t>
+            </a:r>
+            <a:br>
+              <a:rPr lang="en-US" altLang="ko-KR" dirty="0"/>
+            </a:br>
+            <a:r>
+              <a:rPr lang="ko-KR" altLang="en-US" dirty="0" err="1"/>
+              <a:t>머신러닝이</a:t>
+            </a:r>
+            <a:r>
+              <a:rPr lang="ko-KR" altLang="en-US" dirty="0"/>
+              <a:t> 잘 작동할 수 있는 환경을 만드는 단계다</a:t>
+            </a:r>
+            <a:r>
+              <a:rPr lang="en-US" altLang="ko-KR" dirty="0"/>
+              <a:t>.</a:t>
+            </a:r>
+            <a:endParaRPr lang="ko-KR" altLang="en-US" dirty="0"/>
+          </a:p>
+        </p:txBody>
+      </p:sp>
+      <p:sp>
+        <p:nvSpPr>
+          <p:cNvPr id="4" name="슬라이드 번호 개체 틀 3"/>
+          <p:cNvSpPr>
+            <a:spLocks noGrp="1"/>
+          </p:cNvSpPr>
+          <p:nvPr>
+            <p:ph type="sldNum" sz="quarter" idx="5"/>
+          </p:nvPr>
+        </p:nvSpPr>
+        <p:spPr/>
+        <p:txBody>
+          <a:bodyPr/>
+          <a:lstStyle/>
+          <a:p>
+            <a:fld id="{3E35EA20-6519-4513-9EDC-C89C5369BAEC}" type="slidenum">
+              <a:rPr lang="ko-KR" altLang="en-US" smtClean="0"/>
+              <a:pPr/>
+              <a:t>21</a:t>
+            </a:fld>
+            <a:endParaRPr lang="ko-KR" altLang="en-US" dirty="0"/>
+          </a:p>
+        </p:txBody>
+      </p:sp>
+    </p:spTree>
+    <p:extLst>
+      <p:ext uri="{BB962C8B-B14F-4D97-AF65-F5344CB8AC3E}">
+        <p14:creationId xmlns:p14="http://schemas.microsoft.com/office/powerpoint/2010/main" val="1892892232"/>
+      </p:ext>
+    </p:extLst>
+  </p:cSld>
+  <p:clrMapOvr>
+    <a:masterClrMapping/>
+  </p:clrMapOvr>
+</p:notes>
+</file>
+
+<file path=ppt/notesSlides/notesSlide12.xml><?xml version="1.0" encoding="utf-8"?>
+<p:notes xmlns:a="http://schemas.openxmlformats.org/drawingml/2006/main" xmlns:r="http://schemas.openxmlformats.org/officeDocument/2006/relationships" xmlns:p="http://schemas.openxmlformats.org/presentationml/2006/main">
+  <p:cSld>
+    <p:spTree>
+      <p:nvGrpSpPr>
+        <p:cNvPr id="1" name="">
+          <a:extLst>
+            <a:ext uri="{FF2B5EF4-FFF2-40B4-BE49-F238E27FC236}">
+              <a16:creationId xmlns:a16="http://schemas.microsoft.com/office/drawing/2014/main" id="{A9D2EE83-52CB-E118-49CB-3EBDD6EF25B9}"/>
+            </a:ext>
+          </a:extLst>
+        </p:cNvPr>
+        <p:cNvGrpSpPr/>
+        <p:nvPr/>
+      </p:nvGrpSpPr>
+      <p:grpSpPr>
+        <a:xfrm>
+          <a:off x="0" y="0"/>
+          <a:ext cx="0" cy="0"/>
+          <a:chOff x="0" y="0"/>
+          <a:chExt cx="0" cy="0"/>
+        </a:xfrm>
+      </p:grpSpPr>
+      <p:sp>
+        <p:nvSpPr>
+          <p:cNvPr id="2" name="슬라이드 이미지 개체 틀 1">
+            <a:extLst>
+              <a:ext uri="{FF2B5EF4-FFF2-40B4-BE49-F238E27FC236}">
+                <a16:creationId xmlns:a16="http://schemas.microsoft.com/office/drawing/2014/main" id="{30F83B01-3943-C359-9322-8EB719FB824B}"/>
+              </a:ext>
+            </a:extLst>
+          </p:cNvPr>
+          <p:cNvSpPr>
+            <a:spLocks noGrp="1" noRot="1" noChangeAspect="1"/>
+          </p:cNvSpPr>
+          <p:nvPr>
+            <p:ph type="sldImg"/>
+          </p:nvPr>
+        </p:nvSpPr>
+        <p:spPr/>
+      </p:sp>
+      <p:sp>
+        <p:nvSpPr>
+          <p:cNvPr id="3" name="슬라이드 노트 개체 틀 2">
+            <a:extLst>
+              <a:ext uri="{FF2B5EF4-FFF2-40B4-BE49-F238E27FC236}">
+                <a16:creationId xmlns:a16="http://schemas.microsoft.com/office/drawing/2014/main" id="{F2F259CF-8156-0FB2-87BB-C2421F329EA1}"/>
+              </a:ext>
+            </a:extLst>
+          </p:cNvPr>
+          <p:cNvSpPr>
+            <a:spLocks noGrp="1"/>
+          </p:cNvSpPr>
+          <p:nvPr>
+            <p:ph type="body" idx="1"/>
+          </p:nvPr>
+        </p:nvSpPr>
+        <p:spPr/>
+        <p:txBody>
+          <a:bodyPr/>
+          <a:lstStyle/>
+          <a:p>
+            <a:endParaRPr lang="ko-KR" altLang="en-US" dirty="0"/>
+          </a:p>
+        </p:txBody>
+      </p:sp>
+      <p:sp>
+        <p:nvSpPr>
+          <p:cNvPr id="4" name="슬라이드 번호 개체 틀 3">
+            <a:extLst>
+              <a:ext uri="{FF2B5EF4-FFF2-40B4-BE49-F238E27FC236}">
+                <a16:creationId xmlns:a16="http://schemas.microsoft.com/office/drawing/2014/main" id="{5301DD34-5BFE-877A-E657-9B3A6B1B5CDD}"/>
+              </a:ext>
+            </a:extLst>
+          </p:cNvPr>
+          <p:cNvSpPr>
+            <a:spLocks noGrp="1"/>
+          </p:cNvSpPr>
+          <p:nvPr>
+            <p:ph type="sldNum" sz="quarter" idx="10"/>
+          </p:nvPr>
+        </p:nvSpPr>
+        <p:spPr/>
+        <p:txBody>
+          <a:bodyPr/>
+          <a:lstStyle/>
+          <a:p>
+            <a:fld id="{A0085365-8376-4996-BDD6-F39608FADAF3}" type="slidenum">
+              <a:rPr lang="ko-KR" altLang="en-US" smtClean="0"/>
+              <a:t>22</a:t>
+            </a:fld>
+            <a:endParaRPr lang="ko-KR" altLang="en-US"/>
+          </a:p>
+        </p:txBody>
+      </p:sp>
+    </p:spTree>
+    <p:extLst>
+      <p:ext uri="{BB962C8B-B14F-4D97-AF65-F5344CB8AC3E}">
+        <p14:creationId xmlns:p14="http://schemas.microsoft.com/office/powerpoint/2010/main" val="2391645545"/>
+      </p:ext>
+    </p:extLst>
+  </p:cSld>
+  <p:clrMapOvr>
+    <a:masterClrMapping/>
+  </p:clrMapOvr>
+</p:notes>
+</file>
+
 <file path=ppt/notesSlides/notesSlide2.xml><?xml version="1.0" encoding="utf-8"?>
 <p:notes xmlns:a="http://schemas.openxmlformats.org/drawingml/2006/main" xmlns:r="http://schemas.openxmlformats.org/officeDocument/2006/relationships" xmlns:p="http://schemas.openxmlformats.org/presentationml/2006/main">
   <p:cSld>
@@ -1592,13 +1988,7 @@
   <p:cSld>
     <p:spTree>
       <p:nvGrpSpPr>
-        <p:cNvPr id="1" name="">
-          <a:extLst>
-            <a:ext uri="{FF2B5EF4-FFF2-40B4-BE49-F238E27FC236}">
-              <a16:creationId xmlns:a16="http://schemas.microsoft.com/office/drawing/2014/main" id="{A9D2EE83-52CB-E118-49CB-3EBDD6EF25B9}"/>
-            </a:ext>
-          </a:extLst>
-        </p:cNvPr>
+        <p:cNvPr id="1" name=""/>
         <p:cNvGrpSpPr/>
         <p:nvPr/>
       </p:nvGrpSpPr>
@@ -1612,13 +2002,7 @@
       </p:grpSpPr>
       <p:sp>
         <p:nvSpPr>
-          <p:cNvPr id="2" name="슬라이드 이미지 개체 틀 1">
-            <a:extLst>
-              <a:ext uri="{FF2B5EF4-FFF2-40B4-BE49-F238E27FC236}">
-                <a16:creationId xmlns:a16="http://schemas.microsoft.com/office/drawing/2014/main" id="{30F83B01-3943-C359-9322-8EB719FB824B}"/>
-              </a:ext>
-            </a:extLst>
-          </p:cNvPr>
+          <p:cNvPr id="2" name="슬라이드 이미지 개체 틀 1"/>
           <p:cNvSpPr>
             <a:spLocks noGrp="1" noRot="1" noChangeAspect="1"/>
           </p:cNvSpPr>
@@ -1630,13 +2014,7 @@
       </p:sp>
       <p:sp>
         <p:nvSpPr>
-          <p:cNvPr id="3" name="슬라이드 노트 개체 틀 2">
-            <a:extLst>
-              <a:ext uri="{FF2B5EF4-FFF2-40B4-BE49-F238E27FC236}">
-                <a16:creationId xmlns:a16="http://schemas.microsoft.com/office/drawing/2014/main" id="{F2F259CF-8156-0FB2-87BB-C2421F329EA1}"/>
-              </a:ext>
-            </a:extLst>
-          </p:cNvPr>
+          <p:cNvPr id="3" name="슬라이드 노트 개체 틀 2"/>
           <p:cNvSpPr>
             <a:spLocks noGrp="1"/>
           </p:cNvSpPr>
@@ -1649,24 +2027,141 @@
           <a:bodyPr/>
           <a:lstStyle/>
           <a:p>
+            <a:r>
+              <a:rPr lang="ko-KR" altLang="en-US" b="1" dirty="0"/>
+              <a:t>🎤 강사 설명 포인트</a:t>
+            </a:r>
+          </a:p>
+          <a:p>
+            <a:r>
+              <a:rPr lang="ko-KR" altLang="en-US" dirty="0"/>
+              <a:t>“</a:t>
+            </a:r>
+            <a:r>
+              <a:rPr lang="en-US" altLang="ko-KR" dirty="0"/>
+              <a:t>MAE, RMSE(</a:t>
+            </a:r>
+            <a:r>
+              <a:rPr lang="ko-KR" altLang="en-US" dirty="0"/>
+              <a:t>평균 제곱근 오차</a:t>
+            </a:r>
+            <a:r>
+              <a:rPr lang="en-US" altLang="ko-KR" dirty="0"/>
+              <a:t>) </a:t>
+            </a:r>
+            <a:r>
+              <a:rPr lang="ko-KR" altLang="en-US" dirty="0"/>
+              <a:t>같은 숫자는</a:t>
+            </a:r>
+            <a:br>
+              <a:rPr lang="ko-KR" altLang="en-US" dirty="0"/>
+            </a:br>
+            <a:r>
+              <a:rPr lang="ko-KR" altLang="en-US" dirty="0"/>
+              <a:t>결과일 뿐입니다</a:t>
+            </a:r>
+            <a:r>
+              <a:rPr lang="en-US" altLang="ko-KR" dirty="0"/>
+              <a:t>.”</a:t>
+            </a:r>
+          </a:p>
+          <a:p>
+            <a:r>
+              <a:rPr lang="en-US" altLang="ko-KR" dirty="0"/>
+              <a:t>“</a:t>
+            </a:r>
+            <a:r>
+              <a:rPr lang="ko-KR" altLang="en-US" dirty="0"/>
+              <a:t>중요한 건</a:t>
+            </a:r>
+            <a:br>
+              <a:rPr lang="ko-KR" altLang="en-US" dirty="0"/>
+            </a:br>
+            <a:r>
+              <a:rPr lang="ko-KR" altLang="en-US" b="1" dirty="0"/>
+              <a:t>이 숫자가 어떤 조건에서 </a:t>
+            </a:r>
+            <a:r>
+              <a:rPr lang="ko-KR" altLang="en-US" b="1" dirty="0" err="1"/>
+              <a:t>나왔는가</a:t>
+            </a:r>
+            <a:r>
+              <a:rPr lang="ko-KR" altLang="en-US" dirty="0" err="1"/>
+              <a:t>입니다</a:t>
+            </a:r>
+            <a:r>
+              <a:rPr lang="en-US" altLang="ko-KR" dirty="0"/>
+              <a:t>.”</a:t>
+            </a:r>
+          </a:p>
+          <a:p>
+            <a:endParaRPr lang="en-US" altLang="ko-KR" dirty="0"/>
+          </a:p>
+          <a:p>
+            <a:r>
+              <a:rPr lang="ko-KR" altLang="en-US" dirty="0"/>
+              <a:t>“시계열에서는</a:t>
+            </a:r>
+            <a:br>
+              <a:rPr lang="ko-KR" altLang="en-US" dirty="0"/>
+            </a:br>
+            <a:r>
+              <a:rPr lang="ko-KR" altLang="en-US" dirty="0"/>
+              <a:t>정확도보다 </a:t>
+            </a:r>
+            <a:r>
+              <a:rPr lang="ko-KR" altLang="en-US" b="1" dirty="0"/>
+              <a:t>정직함</a:t>
+            </a:r>
+            <a:r>
+              <a:rPr lang="ko-KR" altLang="en-US" dirty="0"/>
+              <a:t>이 먼저입니다</a:t>
+            </a:r>
+            <a:r>
+              <a:rPr lang="en-US" altLang="ko-KR" dirty="0"/>
+              <a:t>.”</a:t>
+            </a:r>
+          </a:p>
+          <a:p>
+            <a:endParaRPr lang="en-US" altLang="ko-KR" dirty="0"/>
+          </a:p>
+          <a:p>
+            <a:r>
+              <a:rPr lang="ko-KR" altLang="en-US" dirty="0"/>
+              <a:t>정직한 분석이란</a:t>
+            </a:r>
+            <a:br>
+              <a:rPr lang="ko-KR" altLang="en-US" dirty="0"/>
+            </a:br>
+            <a:r>
+              <a:rPr lang="ko-KR" altLang="en-US" dirty="0"/>
+              <a:t>현실에서 불가능한 정보를</a:t>
+            </a:r>
+            <a:br>
+              <a:rPr lang="ko-KR" altLang="en-US" dirty="0"/>
+            </a:br>
+            <a:r>
+              <a:rPr lang="ko-KR" altLang="en-US" dirty="0"/>
+              <a:t>분석이나 평가에 사용하지 않는 것이다</a:t>
+            </a:r>
+            <a:r>
+              <a:rPr lang="en-US" altLang="ko-KR" dirty="0"/>
+              <a:t>.</a:t>
+            </a:r>
+          </a:p>
+          <a:p>
             <a:endParaRPr lang="ko-KR" altLang="en-US" dirty="0"/>
           </a:p>
         </p:txBody>
       </p:sp>
       <p:sp>
         <p:nvSpPr>
-          <p:cNvPr id="4" name="슬라이드 번호 개체 틀 3">
-            <a:extLst>
-              <a:ext uri="{FF2B5EF4-FFF2-40B4-BE49-F238E27FC236}">
-                <a16:creationId xmlns:a16="http://schemas.microsoft.com/office/drawing/2014/main" id="{5301DD34-5BFE-877A-E657-9B3A6B1B5CDD}"/>
-              </a:ext>
-            </a:extLst>
-          </p:cNvPr>
-          <p:cNvSpPr>
-            <a:spLocks noGrp="1"/>
-          </p:cNvSpPr>
-          <p:nvPr>
-            <p:ph type="sldNum" sz="quarter" idx="10"/>
+          <p:cNvPr id="4" name="슬라이드 번호 개체 틀 3"/>
+          <p:cNvSpPr>
+            <a:spLocks noGrp="1"/>
+          </p:cNvSpPr>
+          <p:nvPr>
+            <p:ph type="sldNum" sz="quarter" idx="5"/>
           </p:nvPr>
         </p:nvSpPr>
         <p:spPr/>
@@ -1674,18 +2169,19 @@
           <a:bodyPr/>
           <a:lstStyle/>
           <a:p>
-            <a:fld id="{A0085365-8376-4996-BDD6-F39608FADAF3}" type="slidenum">
+            <a:fld id="{3E35EA20-6519-4513-9EDC-C89C5369BAEC}" type="slidenum">
               <a:rPr lang="ko-KR" altLang="en-US" smtClean="0"/>
+              <a:pPr/>
               <a:t>18</a:t>
             </a:fld>
-            <a:endParaRPr lang="ko-KR" altLang="en-US"/>
+            <a:endParaRPr lang="ko-KR" altLang="en-US" dirty="0"/>
           </a:p>
         </p:txBody>
       </p:sp>
     </p:spTree>
     <p:extLst>
       <p:ext uri="{BB962C8B-B14F-4D97-AF65-F5344CB8AC3E}">
-        <p14:creationId xmlns:p14="http://schemas.microsoft.com/office/powerpoint/2010/main" val="2391645545"/>
+        <p14:creationId xmlns:p14="http://schemas.microsoft.com/office/powerpoint/2010/main" val="1277444772"/>
       </p:ext>
     </p:extLst>
   </p:cSld>
@@ -1842,7 +2338,7 @@
           <a:p>
             <a:fld id="{442BEE3F-2E9A-4FD8-8B8A-8619F3E161C0}" type="datetime1">
               <a:rPr lang="ko-KR" altLang="en-US" smtClean="0"/>
-              <a:t>2026-02-05</a:t>
+              <a:t>2026-02-06</a:t>
             </a:fld>
             <a:endParaRPr lang="ko-KR" altLang="en-US"/>
           </a:p>
@@ -2129,7 +2625,7 @@
           <a:p>
             <a:fld id="{0F78D9C4-20C1-4B15-A116-16DC77AD9A1E}" type="datetime1">
               <a:rPr lang="ko-KR" altLang="en-US" smtClean="0"/>
-              <a:t>2026-02-05</a:t>
+              <a:t>2026-02-06</a:t>
             </a:fld>
             <a:endParaRPr lang="ko-KR" altLang="en-US"/>
           </a:p>
@@ -2304,7 +2800,7 @@
           <a:p>
             <a:fld id="{7F5E23C3-0E3D-4E4E-8486-D7FB4C073DC1}" type="datetime1">
               <a:rPr lang="ko-KR" altLang="en-US" smtClean="0"/>
-              <a:t>2026-02-05</a:t>
+              <a:t>2026-02-06</a:t>
             </a:fld>
             <a:endParaRPr lang="ko-KR" altLang="en-US"/>
           </a:p>
@@ -2460,7 +2956,7 @@
           <a:p>
             <a:fld id="{7F5E23C3-0E3D-4E4E-8486-D7FB4C073DC1}" type="datetime1">
               <a:rPr lang="ko-KR" altLang="en-US" smtClean="0"/>
-              <a:t>2026-02-05</a:t>
+              <a:t>2026-02-06</a:t>
             </a:fld>
             <a:endParaRPr lang="ko-KR" altLang="en-US"/>
           </a:p>
@@ -2789,7 +3285,7 @@
           <a:p>
             <a:fld id="{7F5E23C3-0E3D-4E4E-8486-D7FB4C073DC1}" type="datetime1">
               <a:rPr lang="ko-KR" altLang="en-US" smtClean="0"/>
-              <a:t>2026-02-05</a:t>
+              <a:t>2026-02-06</a:t>
             </a:fld>
             <a:endParaRPr lang="ko-KR" altLang="en-US"/>
           </a:p>
@@ -4849,13 +5345,7 @@
   <p:cSld>
     <p:spTree>
       <p:nvGrpSpPr>
-        <p:cNvPr id="1" name="">
-          <a:extLst>
-            <a:ext uri="{FF2B5EF4-FFF2-40B4-BE49-F238E27FC236}">
-              <a16:creationId xmlns:a16="http://schemas.microsoft.com/office/drawing/2014/main" id="{B7171936-481C-71EB-7D96-6C9DFC6F979D}"/>
-            </a:ext>
-          </a:extLst>
-        </p:cNvPr>
+        <p:cNvPr id="1" name=""/>
         <p:cNvGrpSpPr/>
         <p:nvPr/>
       </p:nvGrpSpPr>
@@ -4869,60 +5359,120 @@
       </p:grpSpPr>
       <p:sp>
         <p:nvSpPr>
-          <p:cNvPr id="4" name="제목 1">
+          <p:cNvPr id="2" name="제목 1">
             <a:extLst>
               <a:ext uri="{FF2B5EF4-FFF2-40B4-BE49-F238E27FC236}">
-                <a16:creationId xmlns:a16="http://schemas.microsoft.com/office/drawing/2014/main" id="{100005ED-53E3-BFC8-AFAA-7BAFFA3752AB}"/>
+                <a16:creationId xmlns:a16="http://schemas.microsoft.com/office/drawing/2014/main" id="{7DA7A773-0339-63E5-DB8B-3AEE04863AC0}"/>
               </a:ext>
             </a:extLst>
           </p:cNvPr>
-          <p:cNvSpPr txBox="1">
-            <a:spLocks/>
-          </p:cNvSpPr>
-          <p:nvPr/>
-        </p:nvSpPr>
-        <p:spPr>
-          <a:xfrm>
-            <a:off x="1524000" y="2555530"/>
-            <a:ext cx="9144000" cy="1116107"/>
-          </a:xfrm>
-          <a:prstGeom prst="rect">
-            <a:avLst/>
-          </a:prstGeom>
-        </p:spPr>
-        <p:txBody>
-          <a:bodyPr vert="horz" lIns="91440" tIns="45720" rIns="91440" bIns="45720" rtlCol="0" anchor="b">
-            <a:normAutofit/>
-          </a:bodyPr>
-          <a:lstStyle>
-            <a:lvl1pPr algn="ctr" defTabSz="914400" rtl="0" eaLnBrk="1" latinLnBrk="1" hangingPunct="1">
-              <a:lnSpc>
-                <a:spcPct val="90000"/>
-              </a:lnSpc>
-              <a:spcBef>
-                <a:spcPct val="0"/>
-              </a:spcBef>
-              <a:buNone/>
-              <a:defRPr sz="6000" kern="1200">
-                <a:solidFill>
-                  <a:schemeClr val="tx1"/>
-                </a:solidFill>
-                <a:latin typeface="+mj-lt"/>
-                <a:ea typeface="+mj-ea"/>
-                <a:cs typeface="+mj-cs"/>
-              </a:defRPr>
-            </a:lvl1pPr>
-          </a:lstStyle>
-          <a:p>
-            <a:r>
-              <a:rPr lang="ko-KR" altLang="en-US" dirty="0">
-                <a:solidFill>
-                  <a:schemeClr val="accent2"/>
-                </a:solidFill>
-                <a:latin typeface="G마켓 산스 TTF Bold" panose="02000000000000000000" pitchFamily="2" charset="-127"/>
-                <a:ea typeface="G마켓 산스 TTF Bold" panose="02000000000000000000" pitchFamily="2" charset="-127"/>
-              </a:rPr>
-              <a:t>감사합니다</a:t>
+          <p:cNvSpPr>
+            <a:spLocks noGrp="1"/>
+          </p:cNvSpPr>
+          <p:nvPr>
+            <p:ph type="title"/>
+          </p:nvPr>
+        </p:nvSpPr>
+        <p:spPr/>
+        <p:txBody>
+          <a:bodyPr/>
+          <a:lstStyle/>
+          <a:p>
+            <a:r>
+              <a:rPr lang="ko-KR" altLang="en-US" dirty="0"/>
+              <a:t>평가 지표 해석 시 주의점</a:t>
+            </a:r>
+          </a:p>
+        </p:txBody>
+      </p:sp>
+      <p:sp>
+        <p:nvSpPr>
+          <p:cNvPr id="3" name="내용 개체 틀 2">
+            <a:extLst>
+              <a:ext uri="{FF2B5EF4-FFF2-40B4-BE49-F238E27FC236}">
+                <a16:creationId xmlns:a16="http://schemas.microsoft.com/office/drawing/2014/main" id="{910EFCEF-981E-4219-64BD-65A2ABAC02E0}"/>
+              </a:ext>
+            </a:extLst>
+          </p:cNvPr>
+          <p:cNvSpPr>
+            <a:spLocks noGrp="1"/>
+          </p:cNvSpPr>
+          <p:nvPr>
+            <p:ph idx="1"/>
+          </p:nvPr>
+        </p:nvSpPr>
+        <p:spPr/>
+        <p:txBody>
+          <a:bodyPr/>
+          <a:lstStyle/>
+          <a:p>
+            <a:r>
+              <a:rPr lang="ko-KR" altLang="en-US" dirty="0"/>
+              <a:t>평가 지표는 모델의 </a:t>
+            </a:r>
+            <a:r>
+              <a:rPr lang="en-US" altLang="ko-KR" dirty="0"/>
+              <a:t>‘</a:t>
+            </a:r>
+            <a:r>
+              <a:rPr lang="ko-KR" altLang="en-US" dirty="0"/>
+              <a:t>정직함</a:t>
+            </a:r>
+            <a:r>
+              <a:rPr lang="en-US" altLang="ko-KR" dirty="0"/>
+              <a:t>＇</a:t>
+            </a:r>
+            <a:r>
+              <a:rPr lang="ko-KR" altLang="en-US" dirty="0"/>
+              <a:t>을 보장하지 않음</a:t>
+            </a:r>
+            <a:endParaRPr lang="en-US" altLang="ko-KR" dirty="0"/>
+          </a:p>
+          <a:p>
+            <a:r>
+              <a:rPr lang="ko-KR" altLang="en-US" dirty="0"/>
+              <a:t>숫자가 좋다고 항상 좋은 모델은 아님</a:t>
+            </a:r>
+            <a:endParaRPr lang="en-US" altLang="ko-KR" dirty="0"/>
+          </a:p>
+          <a:p>
+            <a:r>
+              <a:rPr lang="ko-KR" altLang="en-US" dirty="0"/>
+              <a:t>숫자보다 중요한 것</a:t>
+            </a:r>
+            <a:endParaRPr lang="en-US" altLang="ko-KR" dirty="0"/>
+          </a:p>
+          <a:p>
+            <a:pPr lvl="1"/>
+            <a:r>
+              <a:rPr lang="ko-KR" altLang="en-US" dirty="0"/>
+              <a:t>시간 순서를 지켰는가</a:t>
+            </a:r>
+            <a:r>
+              <a:rPr lang="en-US" altLang="ko-KR" dirty="0"/>
+              <a:t>?, </a:t>
+            </a:r>
+            <a:r>
+              <a:rPr lang="ko-KR" altLang="en-US" dirty="0"/>
+              <a:t>미래 정보가 섞이지 않았는가</a:t>
+            </a:r>
+            <a:r>
+              <a:rPr lang="en-US" altLang="ko-KR" dirty="0"/>
+              <a:t>?, </a:t>
+            </a:r>
+            <a:r>
+              <a:rPr lang="ko-KR" altLang="en-US" dirty="0"/>
+              <a:t>실제 사용 상황을 반영했는가</a:t>
+            </a:r>
+            <a:r>
+              <a:rPr lang="en-US" altLang="ko-KR" dirty="0"/>
+              <a:t>? ..</a:t>
+            </a:r>
+          </a:p>
+          <a:p>
+            <a:r>
+              <a:rPr lang="ko-KR" altLang="en-US" dirty="0"/>
+              <a:t>평가 방식이 현실을 반영하는지가 중요</a:t>
             </a:r>
           </a:p>
         </p:txBody>
@@ -4930,7 +5480,139 @@
     </p:spTree>
     <p:extLst>
       <p:ext uri="{BB962C8B-B14F-4D97-AF65-F5344CB8AC3E}">
-        <p14:creationId xmlns:p14="http://schemas.microsoft.com/office/powerpoint/2010/main" val="4171818688"/>
+        <p14:creationId xmlns:p14="http://schemas.microsoft.com/office/powerpoint/2010/main" val="4291492102"/>
+      </p:ext>
+    </p:extLst>
+  </p:cSld>
+  <p:clrMapOvr>
+    <a:masterClrMapping/>
+  </p:clrMapOvr>
+</p:sld>
+</file>
+
+<file path=ppt/slides/slide19.xml><?xml version="1.0" encoding="utf-8"?>
+<p:sld xmlns:a="http://schemas.openxmlformats.org/drawingml/2006/main" xmlns:r="http://schemas.openxmlformats.org/officeDocument/2006/relationships" xmlns:p="http://schemas.openxmlformats.org/presentationml/2006/main">
+  <p:cSld>
+    <p:spTree>
+      <p:nvGrpSpPr>
+        <p:cNvPr id="1" name=""/>
+        <p:cNvGrpSpPr/>
+        <p:nvPr/>
+      </p:nvGrpSpPr>
+      <p:grpSpPr>
+        <a:xfrm>
+          <a:off x="0" y="0"/>
+          <a:ext cx="0" cy="0"/>
+          <a:chOff x="0" y="0"/>
+          <a:chExt cx="0" cy="0"/>
+        </a:xfrm>
+      </p:grpSpPr>
+      <p:sp>
+        <p:nvSpPr>
+          <p:cNvPr id="2" name="제목 1">
+            <a:extLst>
+              <a:ext uri="{FF2B5EF4-FFF2-40B4-BE49-F238E27FC236}">
+                <a16:creationId xmlns:a16="http://schemas.microsoft.com/office/drawing/2014/main" id="{A6FFC444-EA1D-6390-D365-A76EBFDEA1CF}"/>
+              </a:ext>
+            </a:extLst>
+          </p:cNvPr>
+          <p:cNvSpPr>
+            <a:spLocks noGrp="1"/>
+          </p:cNvSpPr>
+          <p:nvPr>
+            <p:ph type="title"/>
+          </p:nvPr>
+        </p:nvSpPr>
+        <p:spPr/>
+        <p:txBody>
+          <a:bodyPr/>
+          <a:lstStyle/>
+          <a:p>
+            <a:r>
+              <a:rPr lang="ko-KR" altLang="en-US" dirty="0"/>
+              <a:t>시계열 분석은 모델이 아니다</a:t>
+            </a:r>
+          </a:p>
+        </p:txBody>
+      </p:sp>
+      <p:sp>
+        <p:nvSpPr>
+          <p:cNvPr id="3" name="내용 개체 틀 2">
+            <a:extLst>
+              <a:ext uri="{FF2B5EF4-FFF2-40B4-BE49-F238E27FC236}">
+                <a16:creationId xmlns:a16="http://schemas.microsoft.com/office/drawing/2014/main" id="{F2DA4730-7928-183F-8A5C-884D52606CBE}"/>
+              </a:ext>
+            </a:extLst>
+          </p:cNvPr>
+          <p:cNvSpPr>
+            <a:spLocks noGrp="1"/>
+          </p:cNvSpPr>
+          <p:nvPr>
+            <p:ph idx="1"/>
+          </p:nvPr>
+        </p:nvSpPr>
+        <p:spPr/>
+        <p:txBody>
+          <a:bodyPr/>
+          <a:lstStyle/>
+          <a:p>
+            <a:r>
+              <a:rPr lang="ko-KR" altLang="en-US" dirty="0"/>
+              <a:t>시계열 분석은 특정한 모델을 의미하지 않음</a:t>
+            </a:r>
+            <a:endParaRPr lang="en-US" altLang="ko-KR" dirty="0"/>
+          </a:p>
+          <a:p>
+            <a:r>
+              <a:rPr lang="ko-KR" altLang="en-US" dirty="0"/>
+              <a:t>데이터를 다루는 규칙과 관점에 가까움</a:t>
+            </a:r>
+            <a:endParaRPr lang="en-US" altLang="ko-KR" dirty="0"/>
+          </a:p>
+          <a:p>
+            <a:r>
+              <a:rPr lang="ko-KR" altLang="en-US" dirty="0"/>
+              <a:t>어떤 모델을 쓰더라도 시계열 규칙은 동일하게 적용</a:t>
+            </a:r>
+            <a:endParaRPr lang="en-US" altLang="ko-KR" dirty="0"/>
+          </a:p>
+          <a:p>
+            <a:pPr lvl="1"/>
+            <a:r>
+              <a:rPr lang="ko-KR" altLang="en-US" dirty="0"/>
+              <a:t>시간 순서 유지</a:t>
+            </a:r>
+            <a:endParaRPr lang="en-US" altLang="ko-KR" dirty="0"/>
+          </a:p>
+          <a:p>
+            <a:pPr lvl="1"/>
+            <a:r>
+              <a:rPr lang="ko-KR" altLang="en-US" dirty="0"/>
+              <a:t>미래 정보는 입력에 포함하지 않는다</a:t>
+            </a:r>
+            <a:endParaRPr lang="en-US" altLang="ko-KR" dirty="0"/>
+          </a:p>
+          <a:p>
+            <a:pPr lvl="1"/>
+            <a:r>
+              <a:rPr lang="ko-KR" altLang="en-US" dirty="0"/>
+              <a:t>예측 시점 기준으로 피처를 만든다</a:t>
+            </a:r>
+            <a:endParaRPr lang="en-US" altLang="ko-KR" dirty="0"/>
+          </a:p>
+          <a:p>
+            <a:pPr lvl="1"/>
+            <a:r>
+              <a:rPr lang="ko-KR" altLang="en-US" dirty="0"/>
+              <a:t>평가는 현실 시나리오와 같아야 한다</a:t>
+            </a:r>
+          </a:p>
+        </p:txBody>
+      </p:sp>
+    </p:spTree>
+    <p:extLst>
+      <p:ext uri="{BB962C8B-B14F-4D97-AF65-F5344CB8AC3E}">
+        <p14:creationId xmlns:p14="http://schemas.microsoft.com/office/powerpoint/2010/main" val="1502225717"/>
       </p:ext>
     </p:extLst>
   </p:cSld>
@@ -4989,6 +5671,412 @@
     <p:extLst>
       <p:ext uri="{BB962C8B-B14F-4D97-AF65-F5344CB8AC3E}">
         <p14:creationId xmlns:p14="http://schemas.microsoft.com/office/powerpoint/2010/main" val="3201905419"/>
+      </p:ext>
+    </p:extLst>
+  </p:cSld>
+  <p:clrMapOvr>
+    <a:masterClrMapping/>
+  </p:clrMapOvr>
+</p:sld>
+</file>
+
+<file path=ppt/slides/slide20.xml><?xml version="1.0" encoding="utf-8"?>
+<p:sld xmlns:a="http://schemas.openxmlformats.org/drawingml/2006/main" xmlns:r="http://schemas.openxmlformats.org/officeDocument/2006/relationships" xmlns:p="http://schemas.openxmlformats.org/presentationml/2006/main">
+  <p:cSld>
+    <p:spTree>
+      <p:nvGrpSpPr>
+        <p:cNvPr id="1" name=""/>
+        <p:cNvGrpSpPr/>
+        <p:nvPr/>
+      </p:nvGrpSpPr>
+      <p:grpSpPr>
+        <a:xfrm>
+          <a:off x="0" y="0"/>
+          <a:ext cx="0" cy="0"/>
+          <a:chOff x="0" y="0"/>
+          <a:chExt cx="0" cy="0"/>
+        </a:xfrm>
+      </p:grpSpPr>
+      <p:sp>
+        <p:nvSpPr>
+          <p:cNvPr id="2" name="제목 1">
+            <a:extLst>
+              <a:ext uri="{FF2B5EF4-FFF2-40B4-BE49-F238E27FC236}">
+                <a16:creationId xmlns:a16="http://schemas.microsoft.com/office/drawing/2014/main" id="{A8C1DC2B-DFCE-9960-22D9-303629F70EBE}"/>
+              </a:ext>
+            </a:extLst>
+          </p:cNvPr>
+          <p:cNvSpPr>
+            <a:spLocks noGrp="1"/>
+          </p:cNvSpPr>
+          <p:nvPr>
+            <p:ph type="title"/>
+          </p:nvPr>
+        </p:nvSpPr>
+        <p:spPr/>
+        <p:txBody>
+          <a:bodyPr/>
+          <a:lstStyle/>
+          <a:p>
+            <a:r>
+              <a:rPr lang="ko-KR" altLang="en-US" dirty="0"/>
+              <a:t>시계열 분석이 </a:t>
+            </a:r>
+            <a:r>
+              <a:rPr lang="ko-KR" altLang="en-US" dirty="0" err="1"/>
+              <a:t>머신러닝에</a:t>
+            </a:r>
+            <a:r>
+              <a:rPr lang="ko-KR" altLang="en-US" dirty="0"/>
+              <a:t> 주는 역할</a:t>
+            </a:r>
+          </a:p>
+        </p:txBody>
+      </p:sp>
+      <p:sp>
+        <p:nvSpPr>
+          <p:cNvPr id="3" name="내용 개체 틀 2">
+            <a:extLst>
+              <a:ext uri="{FF2B5EF4-FFF2-40B4-BE49-F238E27FC236}">
+                <a16:creationId xmlns:a16="http://schemas.microsoft.com/office/drawing/2014/main" id="{1892B0CB-BBF7-C6DD-743A-AF97F663F7DB}"/>
+              </a:ext>
+            </a:extLst>
+          </p:cNvPr>
+          <p:cNvSpPr>
+            <a:spLocks noGrp="1"/>
+          </p:cNvSpPr>
+          <p:nvPr>
+            <p:ph idx="1"/>
+          </p:nvPr>
+        </p:nvSpPr>
+        <p:spPr/>
+        <p:txBody>
+          <a:bodyPr/>
+          <a:lstStyle/>
+          <a:p>
+            <a:r>
+              <a:rPr lang="ko-KR" altLang="en-US" dirty="0"/>
+              <a:t>시계열 분석은 </a:t>
+            </a:r>
+            <a:r>
+              <a:rPr lang="ko-KR" altLang="en-US" dirty="0" err="1"/>
+              <a:t>머신러닝을</a:t>
+            </a:r>
+            <a:r>
+              <a:rPr lang="ko-KR" altLang="en-US" dirty="0"/>
+              <a:t> 위한 준비 단계</a:t>
+            </a:r>
+            <a:endParaRPr lang="en-US" altLang="ko-KR" dirty="0"/>
+          </a:p>
+          <a:p>
+            <a:r>
+              <a:rPr lang="ko-KR" altLang="en-US" dirty="0"/>
+              <a:t>제공하는 것</a:t>
+            </a:r>
+            <a:endParaRPr lang="en-US" altLang="ko-KR" dirty="0"/>
+          </a:p>
+          <a:p>
+            <a:pPr lvl="1"/>
+            <a:r>
+              <a:rPr lang="ko-KR" altLang="en-US" dirty="0"/>
+              <a:t>올바른 데이터 분할</a:t>
+            </a:r>
+            <a:endParaRPr lang="en-US" altLang="ko-KR" dirty="0"/>
+          </a:p>
+          <a:p>
+            <a:pPr lvl="1"/>
+            <a:r>
+              <a:rPr lang="ko-KR" altLang="en-US" dirty="0"/>
+              <a:t>의미 있는 피처 </a:t>
+            </a:r>
+            <a:r>
+              <a:rPr lang="en-US" altLang="ko-KR" dirty="0"/>
+              <a:t>(Lag, Rolling)</a:t>
+            </a:r>
+          </a:p>
+          <a:p>
+            <a:pPr lvl="1"/>
+            <a:r>
+              <a:rPr lang="ko-KR" altLang="en-US" dirty="0"/>
+              <a:t>신뢰 가능한 평가 기준</a:t>
+            </a:r>
+          </a:p>
+        </p:txBody>
+      </p:sp>
+    </p:spTree>
+    <p:extLst>
+      <p:ext uri="{BB962C8B-B14F-4D97-AF65-F5344CB8AC3E}">
+        <p14:creationId xmlns:p14="http://schemas.microsoft.com/office/powerpoint/2010/main" val="429605765"/>
+      </p:ext>
+    </p:extLst>
+  </p:cSld>
+  <p:clrMapOvr>
+    <a:masterClrMapping/>
+  </p:clrMapOvr>
+</p:sld>
+</file>
+
+<file path=ppt/slides/slide21.xml><?xml version="1.0" encoding="utf-8"?>
+<p:sld xmlns:a="http://schemas.openxmlformats.org/drawingml/2006/main" xmlns:r="http://schemas.openxmlformats.org/officeDocument/2006/relationships" xmlns:p="http://schemas.openxmlformats.org/presentationml/2006/main">
+  <p:cSld>
+    <p:spTree>
+      <p:nvGrpSpPr>
+        <p:cNvPr id="1" name=""/>
+        <p:cNvGrpSpPr/>
+        <p:nvPr/>
+      </p:nvGrpSpPr>
+      <p:grpSpPr>
+        <a:xfrm>
+          <a:off x="0" y="0"/>
+          <a:ext cx="0" cy="0"/>
+          <a:chOff x="0" y="0"/>
+          <a:chExt cx="0" cy="0"/>
+        </a:xfrm>
+      </p:grpSpPr>
+      <p:sp>
+        <p:nvSpPr>
+          <p:cNvPr id="2" name="제목 1">
+            <a:extLst>
+              <a:ext uri="{FF2B5EF4-FFF2-40B4-BE49-F238E27FC236}">
+                <a16:creationId xmlns:a16="http://schemas.microsoft.com/office/drawing/2014/main" id="{67DA3AC5-0734-2271-C134-2AAC6A54CC81}"/>
+              </a:ext>
+            </a:extLst>
+          </p:cNvPr>
+          <p:cNvSpPr>
+            <a:spLocks noGrp="1"/>
+          </p:cNvSpPr>
+          <p:nvPr>
+            <p:ph type="title"/>
+          </p:nvPr>
+        </p:nvSpPr>
+        <p:spPr/>
+        <p:txBody>
+          <a:bodyPr/>
+          <a:lstStyle/>
+          <a:p>
+            <a:r>
+              <a:rPr lang="ko-KR" altLang="en-US" dirty="0"/>
+              <a:t>다음 단계</a:t>
+            </a:r>
+            <a:r>
+              <a:rPr lang="en-US" altLang="ko-KR" dirty="0"/>
+              <a:t>: </a:t>
+            </a:r>
+            <a:r>
+              <a:rPr lang="ko-KR" altLang="en-US" dirty="0" err="1"/>
+              <a:t>머신러닝</a:t>
+            </a:r>
+            <a:r>
+              <a:rPr lang="ko-KR" altLang="en-US" dirty="0"/>
+              <a:t> 기초</a:t>
+            </a:r>
+          </a:p>
+        </p:txBody>
+      </p:sp>
+      <p:sp>
+        <p:nvSpPr>
+          <p:cNvPr id="3" name="내용 개체 틀 2">
+            <a:extLst>
+              <a:ext uri="{FF2B5EF4-FFF2-40B4-BE49-F238E27FC236}">
+                <a16:creationId xmlns:a16="http://schemas.microsoft.com/office/drawing/2014/main" id="{48267F83-DBB2-6581-29CA-D26FC3EC7375}"/>
+              </a:ext>
+            </a:extLst>
+          </p:cNvPr>
+          <p:cNvSpPr>
+            <a:spLocks noGrp="1"/>
+          </p:cNvSpPr>
+          <p:nvPr>
+            <p:ph idx="1"/>
+          </p:nvPr>
+        </p:nvSpPr>
+        <p:spPr/>
+        <p:txBody>
+          <a:bodyPr/>
+          <a:lstStyle/>
+          <a:p>
+            <a:r>
+              <a:rPr lang="ko-KR" altLang="en-US" dirty="0"/>
+              <a:t>다음에 배울 것</a:t>
+            </a:r>
+            <a:endParaRPr lang="en-US" altLang="ko-KR" dirty="0"/>
+          </a:p>
+          <a:p>
+            <a:pPr lvl="1"/>
+            <a:r>
+              <a:rPr lang="ko-KR" altLang="en-US"/>
+              <a:t>회귀와 분류</a:t>
+            </a:r>
+            <a:endParaRPr lang="en-US" altLang="ko-KR"/>
+          </a:p>
+          <a:p>
+            <a:pPr lvl="1"/>
+            <a:r>
+              <a:rPr lang="ko-KR" altLang="en-US"/>
+              <a:t>모델 학습 방법</a:t>
+            </a:r>
+            <a:endParaRPr lang="en-US" altLang="ko-KR"/>
+          </a:p>
+          <a:p>
+            <a:pPr lvl="1"/>
+            <a:r>
+              <a:rPr lang="ko-KR" altLang="en-US"/>
+              <a:t>성능 평가</a:t>
+            </a:r>
+            <a:endParaRPr lang="en-US" altLang="ko-KR"/>
+          </a:p>
+          <a:p>
+            <a:pPr lvl="1"/>
+            <a:endParaRPr lang="ko-KR" altLang="en-US" dirty="0"/>
+          </a:p>
+        </p:txBody>
+      </p:sp>
+      <p:pic>
+        <p:nvPicPr>
+          <p:cNvPr id="1026" name="Picture 2" descr="Machine Learning Icon Showing AI Algorithms And Predictive Analytics Models">
+            <a:extLst>
+              <a:ext uri="{FF2B5EF4-FFF2-40B4-BE49-F238E27FC236}">
+                <a16:creationId xmlns:a16="http://schemas.microsoft.com/office/drawing/2014/main" id="{EBB3A31F-780D-1560-D84A-046200A74A5E}"/>
+              </a:ext>
+            </a:extLst>
+          </p:cNvPr>
+          <p:cNvPicPr>
+            <a:picLocks noChangeAspect="1" noChangeArrowheads="1"/>
+          </p:cNvPicPr>
+          <p:nvPr/>
+        </p:nvPicPr>
+        <p:blipFill>
+          <a:blip r:embed="rId3" cstate="print">
+            <a:extLst>
+              <a:ext uri="{28A0092B-C50C-407E-A947-70E740481C1C}">
+                <a14:useLocalDpi xmlns:a14="http://schemas.microsoft.com/office/drawing/2010/main" val="0"/>
+              </a:ext>
+            </a:extLst>
+          </a:blip>
+          <a:srcRect/>
+          <a:stretch>
+            <a:fillRect/>
+          </a:stretch>
+        </p:blipFill>
+        <p:spPr bwMode="auto">
+          <a:xfrm>
+            <a:off x="6705600" y="1401367"/>
+            <a:ext cx="4343400" cy="4343400"/>
+          </a:xfrm>
+          <a:prstGeom prst="rect">
+            <a:avLst/>
+          </a:prstGeom>
+          <a:noFill/>
+          <a:extLst>
+            <a:ext uri="{909E8E84-426E-40DD-AFC4-6F175D3DCCD1}">
+              <a14:hiddenFill xmlns:a14="http://schemas.microsoft.com/office/drawing/2010/main">
+                <a:solidFill>
+                  <a:srgbClr val="FFFFFF"/>
+                </a:solidFill>
+              </a14:hiddenFill>
+            </a:ext>
+          </a:extLst>
+        </p:spPr>
+      </p:pic>
+    </p:spTree>
+    <p:extLst>
+      <p:ext uri="{BB962C8B-B14F-4D97-AF65-F5344CB8AC3E}">
+        <p14:creationId xmlns:p14="http://schemas.microsoft.com/office/powerpoint/2010/main" val="2574224042"/>
+      </p:ext>
+    </p:extLst>
+  </p:cSld>
+  <p:clrMapOvr>
+    <a:masterClrMapping/>
+  </p:clrMapOvr>
+</p:sld>
+</file>
+
+<file path=ppt/slides/slide22.xml><?xml version="1.0" encoding="utf-8"?>
+<p:sld xmlns:a="http://schemas.openxmlformats.org/drawingml/2006/main" xmlns:r="http://schemas.openxmlformats.org/officeDocument/2006/relationships" xmlns:p="http://schemas.openxmlformats.org/presentationml/2006/main">
+  <p:cSld>
+    <p:spTree>
+      <p:nvGrpSpPr>
+        <p:cNvPr id="1" name="">
+          <a:extLst>
+            <a:ext uri="{FF2B5EF4-FFF2-40B4-BE49-F238E27FC236}">
+              <a16:creationId xmlns:a16="http://schemas.microsoft.com/office/drawing/2014/main" id="{B7171936-481C-71EB-7D96-6C9DFC6F979D}"/>
+            </a:ext>
+          </a:extLst>
+        </p:cNvPr>
+        <p:cNvGrpSpPr/>
+        <p:nvPr/>
+      </p:nvGrpSpPr>
+      <p:grpSpPr>
+        <a:xfrm>
+          <a:off x="0" y="0"/>
+          <a:ext cx="0" cy="0"/>
+          <a:chOff x="0" y="0"/>
+          <a:chExt cx="0" cy="0"/>
+        </a:xfrm>
+      </p:grpSpPr>
+      <p:sp>
+        <p:nvSpPr>
+          <p:cNvPr id="4" name="제목 1">
+            <a:extLst>
+              <a:ext uri="{FF2B5EF4-FFF2-40B4-BE49-F238E27FC236}">
+                <a16:creationId xmlns:a16="http://schemas.microsoft.com/office/drawing/2014/main" id="{100005ED-53E3-BFC8-AFAA-7BAFFA3752AB}"/>
+              </a:ext>
+            </a:extLst>
+          </p:cNvPr>
+          <p:cNvSpPr txBox="1">
+            <a:spLocks/>
+          </p:cNvSpPr>
+          <p:nvPr/>
+        </p:nvSpPr>
+        <p:spPr>
+          <a:xfrm>
+            <a:off x="1524000" y="2555530"/>
+            <a:ext cx="9144000" cy="1116107"/>
+          </a:xfrm>
+          <a:prstGeom prst="rect">
+            <a:avLst/>
+          </a:prstGeom>
+        </p:spPr>
+        <p:txBody>
+          <a:bodyPr vert="horz" lIns="91440" tIns="45720" rIns="91440" bIns="45720" rtlCol="0" anchor="b">
+            <a:normAutofit/>
+          </a:bodyPr>
+          <a:lstStyle>
+            <a:lvl1pPr algn="ctr" defTabSz="914400" rtl="0" eaLnBrk="1" latinLnBrk="1" hangingPunct="1">
+              <a:lnSpc>
+                <a:spcPct val="90000"/>
+              </a:lnSpc>
+              <a:spcBef>
+                <a:spcPct val="0"/>
+              </a:spcBef>
+              <a:buNone/>
+              <a:defRPr sz="6000" kern="1200">
+                <a:solidFill>
+                  <a:schemeClr val="tx1"/>
+                </a:solidFill>
+                <a:latin typeface="+mj-lt"/>
+                <a:ea typeface="+mj-ea"/>
+                <a:cs typeface="+mj-cs"/>
+              </a:defRPr>
+            </a:lvl1pPr>
+          </a:lstStyle>
+          <a:p>
+            <a:r>
+              <a:rPr lang="ko-KR" altLang="en-US" dirty="0">
+                <a:solidFill>
+                  <a:schemeClr val="accent2"/>
+                </a:solidFill>
+                <a:latin typeface="G마켓 산스 TTF Bold" panose="02000000000000000000" pitchFamily="2" charset="-127"/>
+                <a:ea typeface="G마켓 산스 TTF Bold" panose="02000000000000000000" pitchFamily="2" charset="-127"/>
+              </a:rPr>
+              <a:t>감사합니다</a:t>
+            </a:r>
+          </a:p>
+        </p:txBody>
+      </p:sp>
+    </p:spTree>
+    <p:extLst>
+      <p:ext uri="{BB962C8B-B14F-4D97-AF65-F5344CB8AC3E}">
+        <p14:creationId xmlns:p14="http://schemas.microsoft.com/office/powerpoint/2010/main" val="4171818688"/>
       </p:ext>
     </p:extLst>
   </p:cSld>

--- a/material/5_AI/05_시계열 분석.pptx
+++ b/material/5_AI/05_시계열 분석.pptx
@@ -239,7 +239,7 @@
             <a:fld id="{A13A867C-D490-40C2-AB8D-A60FA70A9BF5}" type="datetimeFigureOut">
               <a:rPr lang="ko-KR" altLang="en-US" smtClean="0"/>
               <a:pPr/>
-              <a:t>2026-02-06</a:t>
+              <a:t>2026-02-09</a:t>
             </a:fld>
             <a:endParaRPr lang="ko-KR" altLang="en-US" dirty="0"/>
           </a:p>
@@ -2338,7 +2338,7 @@
           <a:p>
             <a:fld id="{442BEE3F-2E9A-4FD8-8B8A-8619F3E161C0}" type="datetime1">
               <a:rPr lang="ko-KR" altLang="en-US" smtClean="0"/>
-              <a:t>2026-02-06</a:t>
+              <a:t>2026-02-09</a:t>
             </a:fld>
             <a:endParaRPr lang="ko-KR" altLang="en-US"/>
           </a:p>
@@ -2625,7 +2625,7 @@
           <a:p>
             <a:fld id="{0F78D9C4-20C1-4B15-A116-16DC77AD9A1E}" type="datetime1">
               <a:rPr lang="ko-KR" altLang="en-US" smtClean="0"/>
-              <a:t>2026-02-06</a:t>
+              <a:t>2026-02-09</a:t>
             </a:fld>
             <a:endParaRPr lang="ko-KR" altLang="en-US"/>
           </a:p>
@@ -2800,7 +2800,7 @@
           <a:p>
             <a:fld id="{7F5E23C3-0E3D-4E4E-8486-D7FB4C073DC1}" type="datetime1">
               <a:rPr lang="ko-KR" altLang="en-US" smtClean="0"/>
-              <a:t>2026-02-06</a:t>
+              <a:t>2026-02-09</a:t>
             </a:fld>
             <a:endParaRPr lang="ko-KR" altLang="en-US"/>
           </a:p>
@@ -2956,7 +2956,7 @@
           <a:p>
             <a:fld id="{7F5E23C3-0E3D-4E4E-8486-D7FB4C073DC1}" type="datetime1">
               <a:rPr lang="ko-KR" altLang="en-US" smtClean="0"/>
-              <a:t>2026-02-06</a:t>
+              <a:t>2026-02-09</a:t>
             </a:fld>
             <a:endParaRPr lang="ko-KR" altLang="en-US"/>
           </a:p>
@@ -3285,7 +3285,7 @@
           <a:p>
             <a:fld id="{7F5E23C3-0E3D-4E4E-8486-D7FB4C073DC1}" type="datetime1">
               <a:rPr lang="ko-KR" altLang="en-US" smtClean="0"/>
-              <a:t>2026-02-06</a:t>
+              <a:t>2026-02-09</a:t>
             </a:fld>
             <a:endParaRPr lang="ko-KR" altLang="en-US"/>
           </a:p>
@@ -4881,7 +4881,11 @@
           <a:p>
             <a:r>
               <a:rPr lang="ko-KR" altLang="en-US" dirty="0"/>
-              <a:t>시계열 분석의 목적은 미래의 값을 예측하는 것</a:t>
+              <a:t>시계열 분석은 필요한 경우 미래의 값을 </a:t>
+            </a:r>
+            <a:r>
+              <a:rPr lang="ko-KR" altLang="en-US"/>
+              <a:t>예측하기 위해 사용됨</a:t>
             </a:r>
             <a:endParaRPr lang="en-US" altLang="ko-KR" dirty="0"/>
           </a:p>
@@ -6197,7 +6201,15 @@
           <a:p>
             <a:r>
               <a:rPr lang="ko-KR" altLang="en-US" dirty="0"/>
-              <a:t>과거 데이터 기반의 미래 예측 및 변동성 파악에 핵심적으로 활용됨</a:t>
+              <a:t>과거 데이터 기반의 </a:t>
+            </a:r>
+            <a:r>
+              <a:rPr lang="ko-KR" altLang="en-US" b="1" dirty="0"/>
+              <a:t>패턴 이해 및 필요 시 미래 예측</a:t>
+            </a:r>
+            <a:r>
+              <a:rPr lang="ko-KR" altLang="en-US" dirty="0"/>
+              <a:t>에 활용됨</a:t>
             </a:r>
             <a:endParaRPr lang="en-US" altLang="ko-KR" dirty="0"/>
           </a:p>
